--- a/SBI_presentation.pptx
+++ b/SBI_presentation.pptx
@@ -779,7 +779,7 @@
           <a:p>
             <a:r>
               <a:rPr lang="en-US" dirty="0"/>
-              <a:t>The bars for BayesFlow and FB are the same height in every group — that's the whole thesis: faithful amortization. Both track ground truth equally.</a:t>
+              <a:t>This is the SBI-specific evidence the course asks for (convergence + calibration + contraction), and it's the most likely place questions land. Own the SBC result: the posterior is a superb point estimate (r=0.999) but its uncertainty is slightly mis-located — a ~0.15-SD bias that only a sensitive test like SBC catches. We diagnosed it: NOT the logit-clip atom at residue 0 (excluding it doesn't fix SBC); the more likely cause is that the 3 target dims are 0.89-0.96 correlated, which coupling flows handle poorly. Showing you found AND interpreted a calibration failure is worth more than hiding it.</a:t>
             </a:r>
             <a:endParaRPr lang="en-US" dirty="0"/>
           </a:p>
@@ -867,7 +867,7 @@
           <a:p>
             <a:r>
               <a:rPr lang="en-US" dirty="0"/>
-              <a:t>Read the table row by row. Key: the two method columns are equal everywhere, and no number beats exact FB — which is the correctness signature, since FB is the exact Bayesian posterior.</a:t>
+              <a:t>The two method columns are equal everywhere (faithful amortization). The added baseline column is the honest reading: on insulin the model never crosses P=0.5, so accuracy collapses to the baseline. Do NOT claim FB is a ceiling on real data — it isn't, because the HMM is misspecified there.</a:t>
             </a:r>
             <a:endParaRPr lang="en-US" dirty="0"/>
           </a:p>
@@ -1307,7 +1307,7 @@
           <a:p>
             <a:r>
               <a:rPr lang="en-US" dirty="0"/>
-              <a:t>Each state emits amino acids with its own propensities (helix loves A,L,E; breakers G,P favor other). We verified the GIVEN transition probabilities against real sst8 data — they match within ~1 point, confirming the model's macro-statistics are realistic.</a:t>
+              <a:t>Each state emits amino acids with its own propensities (helix loves A,L,E; breakers G,P favor other). We measured the empirical P(amino acid | DSSP H vs non-H) from real PISCES and overlaid it on the given tables: correlation 0.992 (helix) / 0.982 (other), max deviation 0.9 pp. Transitions match too. So both halves of the model are grounded in data. (The old 'transitions-only' evidence was a mismatch with this slide's title — now fixed.)</a:t>
             </a:r>
             <a:endParaRPr lang="en-US" dirty="0"/>
           </a:p>
@@ -1659,7 +1659,7 @@
           <a:p>
             <a:r>
               <a:rPr lang="en-US" dirty="0"/>
-              <a:t>This is the assignment's step 4. Note: absolute P(helix) peaks only ~0.56 on the B-chain — the fixed HMM is uncalibrated to real proteins, so AUC (ranking) is the fair metric, not accuracy@0.5.</a:t>
+              <a:t>CORRECTION from an earlier version: 1A7F is a MUTANT insulin (B16E, B24G, des-B30) whose sparse A-chain annotation inflated the A-chain AUC to 0.97. On wild-type 1MSO the A-chain is at chance (0.52). The B-chain (0.98) is genuine. The A-chain failure is scientifically informative: its N-terminal helix is stabilised by disulfide bonds, and cysteine is helix-disfavouring in the emission table, so a propensity HMM predicts non-helix exactly where the helix is. Insulin rests on only 2-4 chains — illustrative, not a robust benchmark.</a:t>
             </a:r>
             <a:endParaRPr lang="en-US" dirty="0"/>
           </a:p>
@@ -3056,7 +3056,7 @@
                 <a:ea typeface="Cambria" pitchFamily="34" charset="-122"/>
                 <a:cs typeface="Cambria" pitchFamily="34" charset="-120"/>
               </a:rPr>
-              <a:t>Result 2: head-to-head across every setting</a:t>
+              <a:t>SBI diagnostics: convergence, calibration, contraction</a:t>
             </a:r>
             <a:endParaRPr lang="en-US" sz="2700" dirty="0"/>
           </a:p>
@@ -3064,7 +3064,7 @@
       </p:sp>
       <p:pic>
         <p:nvPicPr>
-          <p:cNvPr id="6" name="Image 0" descr="D:/SBI/restart/comparison.png">    </p:cNvPr>
+          <p:cNvPr id="6" name="Image 0" descr="D:/SBI/restart/diag_loss.png">    </p:cNvPr>
           <p:cNvPicPr>
             <a:picLocks noChangeAspect="1"/>
           </p:cNvPicPr>
@@ -3078,8 +3078,8 @@
         </p:blipFill>
         <p:spPr>
           <a:xfrm>
-            <a:off x="1325880" y="1645920"/>
-            <a:ext cx="9509760" cy="3803904"/>
+            <a:off x="502920" y="1828800"/>
+            <a:ext cx="3977640" cy="2386584"/>
           </a:xfrm>
           <a:prstGeom prst="rect">
             <a:avLst/>
@@ -3094,8 +3094,8 @@
         </p:nvSpPr>
         <p:spPr>
           <a:xfrm>
-            <a:off x="1325880" y="5486400"/>
-            <a:ext cx="9509760" cy="457200"/>
+            <a:off x="502920" y="4206240"/>
+            <a:ext cx="3977640" cy="457200"/>
           </a:xfrm>
           <a:prstGeom prst="rect">
             <a:avLst/>
@@ -3119,22 +3119,46 @@
                 <a:ea typeface="Calibri" pitchFamily="34" charset="-122"/>
                 <a:cs typeface="Calibri" pitchFamily="34" charset="-120"/>
               </a:rPr>
-              <a:t>Fig 8. AUC and accuracy@0.5: BayesFlow vs exact FB across all four settings.</a:t>
+              <a:t>Fig 8a. Training loss.</a:t>
             </a:r>
             <a:endParaRPr lang="en-US" sz="1100" dirty="0"/>
           </a:p>
         </p:txBody>
       </p:sp>
-      <p:sp>
-        <p:nvSpPr>
-          <p:cNvPr id="8" name="Text 5"/>
-          <p:cNvSpPr/>
-          <p:nvPr/>
-        </p:nvSpPr>
-        <p:spPr>
-          <a:xfrm>
-            <a:off x="640080" y="5989320"/>
-            <a:ext cx="10972800" cy="548640"/>
+      <p:pic>
+        <p:nvPicPr>
+          <p:cNvPr id="8" name="Image 1" descr="D:/SBI/restart/diag_sbc_ecdf.png">    </p:cNvPr>
+          <p:cNvPicPr>
+            <a:picLocks noChangeAspect="1"/>
+          </p:cNvPicPr>
+          <p:nvPr/>
+        </p:nvPicPr>
+        <p:blipFill>
+          <a:blip r:embed="rId2"/>
+          <a:stretch>
+            <a:fillRect/>
+          </a:stretch>
+        </p:blipFill>
+        <p:spPr>
+          <a:xfrm>
+            <a:off x="4800600" y="1874520"/>
+            <a:ext cx="6812280" cy="2231136"/>
+          </a:xfrm>
+          <a:prstGeom prst="rect">
+            <a:avLst/>
+          </a:prstGeom>
+        </p:spPr>
+      </p:pic>
+      <p:sp>
+        <p:nvSpPr>
+          <p:cNvPr id="9" name="Text 5"/>
+          <p:cNvSpPr/>
+          <p:nvPr/>
+        </p:nvSpPr>
+        <p:spPr>
+          <a:xfrm>
+            <a:off x="4800600" y="4160520"/>
+            <a:ext cx="6812280" cy="457200"/>
           </a:xfrm>
           <a:prstGeom prst="rect">
             <a:avLst/>
@@ -3150,21 +3174,50 @@
               <a:buNone/>
             </a:pPr>
             <a:r>
-              <a:rPr lang="en-US" sz="1400" b="1" dirty="0">
-                <a:solidFill>
-                  <a:srgbClr val="0F6E56"/>
+              <a:rPr lang="en-US" sz="1100" i="1" dirty="0">
+                <a:solidFill>
+                  <a:srgbClr val="5B6B66"/>
                 </a:solidFill>
                 <a:latin typeface="Calibri" pitchFamily="34" charset="0"/>
                 <a:ea typeface="Calibri" pitchFamily="34" charset="-122"/>
                 <a:cs typeface="Calibri" pitchFamily="34" charset="-120"/>
               </a:rPr>
-              <a:t>BayesFlow and exact FB are identical everywhere.  </a:t>
-            </a:r>
-            <a:pPr algn="ctr" indent="0" marL="0">
-              <a:buNone/>
-            </a:pPr>
-            <a:r>
-              <a:rPr lang="en-US" sz="1400" dirty="0">
+              <a:t>Fig 8b. Simulation-based calibration (SBC) rank ECDF, per target dim.</a:t>
+            </a:r>
+            <a:endParaRPr lang="en-US" sz="1100" dirty="0"/>
+          </a:p>
+        </p:txBody>
+      </p:sp>
+      <p:sp>
+        <p:nvSpPr>
+          <p:cNvPr id="10" name="Text 6"/>
+          <p:cNvSpPr/>
+          <p:nvPr/>
+        </p:nvSpPr>
+        <p:spPr>
+          <a:xfrm>
+            <a:off x="502920" y="4617720"/>
+            <a:ext cx="11155680" cy="2011680"/>
+          </a:xfrm>
+          <a:prstGeom prst="rect">
+            <a:avLst/>
+          </a:prstGeom>
+          <a:noFill/>
+          <a:ln/>
+        </p:spPr>
+        <p:txBody>
+          <a:bodyPr wrap="square" rtlCol="0" anchor="t"/>
+          <a:lstStyle/>
+          <a:p>
+            <a:pPr marL="177800" indent="-177800">
+              <a:spcAft>
+                <a:spcPts val="800"/>
+              </a:spcAft>
+              <a:buSzPct val="100000"/>
+              <a:buChar char="•"/>
+            </a:pPr>
+            <a:r>
+              <a:rPr lang="en-US" sz="1250" dirty="0">
                 <a:solidFill>
                   <a:srgbClr val="1A2E29"/>
                 </a:solidFill>
@@ -3172,9 +3225,51 @@
                 <a:ea typeface="Calibri" pitchFamily="34" charset="-122"/>
                 <a:cs typeface="Calibri" pitchFamily="34" charset="-120"/>
               </a:rPr>
-              <a:t>High on insulin’s textbook helices (0.97–0.98); ~0.75 across the real proteome.</a:t>
-            </a:r>
-            <a:endParaRPr lang="en-US" sz="1400" dirty="0"/>
+              <a:t>Convergence: loss −3.8 → −7.9, plateaued.  Recovery r = 0.999 and posterior contraction 0.999 — the estimate is excellent and tight.</a:t>
+            </a:r>
+            <a:endParaRPr lang="en-US" sz="1250" dirty="0"/>
+          </a:p>
+          <a:p>
+            <a:pPr marL="177800" indent="-177800">
+              <a:spcAft>
+                <a:spcPts val="800"/>
+              </a:spcAft>
+              <a:buSzPct val="100000"/>
+              <a:buChar char="•"/>
+            </a:pPr>
+            <a:r>
+              <a:rPr lang="en-US" sz="1250" dirty="0">
+                <a:solidFill>
+                  <a:srgbClr val="1A2E29"/>
+                </a:solidFill>
+                <a:latin typeface="Calibri" pitchFamily="34" charset="0"/>
+                <a:ea typeface="Calibri" pitchFamily="34" charset="-122"/>
+                <a:cs typeface="Calibri" pitchFamily="34" charset="-120"/>
+              </a:rPr>
+              <a:t>SBC (right): the rank ECDF slightly exits the 95% band → a small location bias (~0.15 posterior SD ≈ 0.002 in probability). The uncertainty band is not perfectly calibrated.</a:t>
+            </a:r>
+            <a:endParaRPr lang="en-US" sz="1250" dirty="0"/>
+          </a:p>
+          <a:p>
+            <a:pPr marL="177800" indent="-177800">
+              <a:spcAft>
+                <a:spcPts val="800"/>
+              </a:spcAft>
+              <a:buSzPct val="100000"/>
+              <a:buChar char="•"/>
+            </a:pPr>
+            <a:r>
+              <a:rPr lang="en-US" sz="1250" dirty="0">
+                <a:solidFill>
+                  <a:srgbClr val="1A2E29"/>
+                </a:solidFill>
+                <a:latin typeface="Calibri" pitchFamily="34" charset="0"/>
+                <a:ea typeface="Calibri" pitchFamily="34" charset="-122"/>
+                <a:cs typeface="Calibri" pitchFamily="34" charset="-120"/>
+              </a:rPr>
+              <a:t>Honest limitation: point estimates are unaffected; likely cause is the near-degenerate 3-D target (dim-correlations 0.89–0.96) vs a coupling flow. Candidate fix left as future work.</a:t>
+            </a:r>
+            <a:endParaRPr lang="en-US" sz="1250" dirty="0"/>
           </a:p>
         </p:txBody>
       </p:sp>
@@ -3363,8 +3458,8 @@
         </p:blipFill>
         <p:spPr>
           <a:xfrm>
-            <a:off x="822960" y="1783080"/>
-            <a:ext cx="10515600" cy="2670048"/>
+            <a:off x="960120" y="1783080"/>
+            <a:ext cx="10241280" cy="2560320"/>
           </a:xfrm>
           <a:prstGeom prst="rect">
             <a:avLst/>
@@ -3379,8 +3474,8 @@
         </p:nvSpPr>
         <p:spPr>
           <a:xfrm>
-            <a:off x="822960" y="4572000"/>
-            <a:ext cx="10515600" cy="457200"/>
+            <a:off x="960120" y="4434840"/>
+            <a:ext cx="10241280" cy="457200"/>
           </a:xfrm>
           <a:prstGeom prst="rect">
             <a:avLst/>
@@ -3404,7 +3499,7 @@
                 <a:ea typeface="Calibri" pitchFamily="34" charset="-122"/>
                 <a:cs typeface="Calibri" pitchFamily="34" charset="-120"/>
               </a:rPr>
-              <a:t>Table 1. AUC and accuracy@0.5 — BayesFlow vs exact Forward–Backward, all settings.</a:t>
+              <a:t>Table 1. AUC &amp; accuracy@0.5 vs the majority-class baseline — BayesFlow vs exact FB.</a:t>
             </a:r>
             <a:endParaRPr lang="en-US" sz="1100" dirty="0"/>
           </a:p>
@@ -3418,8 +3513,8 @@
         </p:nvSpPr>
         <p:spPr>
           <a:xfrm>
-            <a:off x="1280160" y="5029200"/>
-            <a:ext cx="9692640" cy="1463040"/>
+            <a:off x="1005840" y="4846320"/>
+            <a:ext cx="10149840" cy="1737360"/>
           </a:xfrm>
           <a:prstGeom prst="rect">
             <a:avLst/>
@@ -3439,7 +3534,7 @@
               <a:buChar char="•"/>
             </a:pPr>
             <a:r>
-              <a:rPr lang="en-US" sz="1350" dirty="0">
+              <a:rPr lang="en-US" sz="1300" dirty="0">
                 <a:solidFill>
                   <a:srgbClr val="1A2E29"/>
                 </a:solidFill>
@@ -3447,9 +3542,9 @@
                 <a:ea typeface="Calibri" pitchFamily="34" charset="-122"/>
                 <a:cs typeface="Calibri" pitchFamily="34" charset="-120"/>
               </a:rPr>
-              <a:t>BayesFlow ≈ exact FB in every setting (AUC identical to 3 decimals).</a:t>
-            </a:r>
-            <a:endParaRPr lang="en-US" sz="1350" dirty="0"/>
+              <a:t>BayesFlow ≈ exact FB in every setting — faithful amortization.</a:t>
+            </a:r>
+            <a:endParaRPr lang="en-US" sz="1300" dirty="0"/>
           </a:p>
           <a:p>
             <a:pPr marL="177800" indent="-177800">
@@ -3460,7 +3555,7 @@
               <a:buChar char="•"/>
             </a:pPr>
             <a:r>
-              <a:rPr lang="en-US" sz="1350" dirty="0">
+              <a:rPr lang="en-US" sz="1300" dirty="0">
                 <a:solidFill>
                   <a:srgbClr val="1A2E29"/>
                 </a:solidFill>
@@ -3468,9 +3563,9 @@
                 <a:ea typeface="Calibri" pitchFamily="34" charset="-122"/>
                 <a:cs typeface="Calibri" pitchFamily="34" charset="-120"/>
               </a:rPr>
-              <a:t>Both approach — never beat — the exact Bayesian answer (the AUC ceiling).</a:t>
-            </a:r>
-            <a:endParaRPr lang="en-US" sz="1350" dirty="0"/>
+              <a:t>Accuracy@0.5 only beats the trivial baseline on the calibrated (simulated / pooled real) settings; on insulin it ties or falls below it → AUC is the fair metric.</a:t>
+            </a:r>
+            <a:endParaRPr lang="en-US" sz="1300" dirty="0"/>
           </a:p>
           <a:p>
             <a:pPr marL="177800" indent="-177800">
@@ -3481,7 +3576,7 @@
               <a:buChar char="•"/>
             </a:pPr>
             <a:r>
-              <a:rPr lang="en-US" sz="1350" dirty="0">
+              <a:rPr lang="en-US" sz="1300" dirty="0">
                 <a:solidFill>
                   <a:srgbClr val="1A2E29"/>
                 </a:solidFill>
@@ -3489,9 +3584,9 @@
                 <a:ea typeface="Calibri" pitchFamily="34" charset="-122"/>
                 <a:cs typeface="Calibri" pitchFamily="34" charset="-120"/>
               </a:rPr>
-              <a:t>Accuracy &lt; AUC on real data: a calibration gap, expected for a fixed HMM.</a:t>
-            </a:r>
-            <a:endParaRPr lang="en-US" sz="1350" dirty="0"/>
+              <a:t>FB is a ceiling on SIMULATED data only; on real proteins the HMM is misspecified, so a better model can beat it.</a:t>
+            </a:r>
+            <a:endParaRPr lang="en-US" sz="1300" dirty="0"/>
           </a:p>
         </p:txBody>
       </p:sp>
@@ -3613,8 +3708,8 @@
         </p:nvSpPr>
         <p:spPr>
           <a:xfrm>
-            <a:off x="685800" y="1600200"/>
-            <a:ext cx="10607040" cy="3108960"/>
+            <a:off x="685800" y="1554480"/>
+            <a:ext cx="10607040" cy="3383280"/>
           </a:xfrm>
           <a:prstGeom prst="rect">
             <a:avLst/>
@@ -3628,7 +3723,7 @@
           <a:p>
             <a:pPr marL="177800" indent="-177800">
               <a:spcAft>
-                <a:spcPts val="1200"/>
+                <a:spcPts val="1100"/>
               </a:spcAft>
               <a:buSzPct val="100000"/>
               <a:buChar char="•"/>
@@ -3642,14 +3737,14 @@
                 <a:ea typeface="Calibri" pitchFamily="34" charset="-122"/>
                 <a:cs typeface="Calibri" pitchFamily="34" charset="-120"/>
               </a:rPr>
-              <a:t>α-helix modeled as a 2-state HMM whose transition probabilities match real proteins (0.912 vs 0.90).</a:t>
+              <a:t>α-helix as a 2-state HMM whose transition AND emission tables match real proteins (r ≈ 0.99).</a:t>
             </a:r>
             <a:endParaRPr lang="en-US" sz="1600" dirty="0"/>
           </a:p>
           <a:p>
             <a:pPr marL="177800" indent="-177800">
               <a:spcAft>
-                <a:spcPts val="1200"/>
+                <a:spcPts val="1100"/>
               </a:spcAft>
               <a:buSzPct val="100000"/>
               <a:buChar char="•"/>
@@ -3663,14 +3758,14 @@
                 <a:ea typeface="Calibri" pitchFamily="34" charset="-122"/>
                 <a:cs typeface="Calibri" pitchFamily="34" charset="-120"/>
               </a:rPr>
-              <a:t>Trained a BayesFlow amortized posterior on exact Forward–Backward targets via a sliding 31-residue window.</a:t>
+              <a:t>BayesFlow amortized posterior trained on exact Forward–Backward targets via a sliding 31-residue window; it reproduces exact FB almost perfectly (r = 0.999).</a:t>
             </a:r>
             <a:endParaRPr lang="en-US" sz="1600" dirty="0"/>
           </a:p>
           <a:p>
             <a:pPr marL="177800" indent="-177800">
               <a:spcAft>
-                <a:spcPts val="1200"/>
+                <a:spcPts val="1100"/>
               </a:spcAft>
               <a:buSzPct val="100000"/>
               <a:buChar char="•"/>
@@ -3684,7 +3779,7 @@
                 <a:ea typeface="Calibri" pitchFamily="34" charset="-122"/>
                 <a:cs typeface="Calibri" pitchFamily="34" charset="-120"/>
               </a:rPr>
-              <a:t>It reproduces exact FB almost perfectly (r = 0.999) — instant inference, no HMM at test time.</a:t>
+              <a:t>Diagnostics: excellent recovery &amp; contraction, but SBC reveals a small (~0.15 SD) calibration bias — a real, owned limitation.</a:t>
             </a:r>
             <a:endParaRPr lang="en-US" sz="1600" dirty="0"/>
           </a:p>
@@ -3702,7 +3797,7 @@
                 <a:ea typeface="Calibri" pitchFamily="34" charset="-122"/>
                 <a:cs typeface="Calibri" pitchFamily="34" charset="-120"/>
               </a:rPr>
-              <a:t>On unseen real proteins it ranks helices well (insulin 0.97–0.98; PISCES 0.75), bounded by the model’s Bayes ceiling.</a:t>
+              <a:t>On unseen real proteins it ranks propensity-driven helices well (insulin B-chain 0.98; PISCES 0.75) but fails where structure is 3-D-stabilised (insulin A-chain 0.52) — the price of a sequence-only model.</a:t>
             </a:r>
             <a:endParaRPr lang="en-US" sz="1600" dirty="0"/>
           </a:p>
@@ -5520,7 +5615,7 @@
                 <a:ea typeface="Calibri" pitchFamily="34" charset="-122"/>
                 <a:cs typeface="Calibri" pitchFamily="34" charset="-120"/>
               </a:rPr>
-              <a:t>Model checks out against real data:   </a:t>
+              <a:t>Yes — checked against real PISCES data:   </a:t>
             </a:r>
             <a:pPr indent="0" marL="0">
               <a:buNone/>
@@ -5534,7 +5629,7 @@
                 <a:ea typeface="Calibri" pitchFamily="34" charset="-122"/>
                 <a:cs typeface="Calibri" pitchFamily="34" charset="-120"/>
               </a:rPr>
-              <a:t>P(helix→helix) 0.912 vs 0.90   ·   P(other→helix) 0.041 vs 0.05   ·   mean helix run 11.4 vs 10   ·   100% of real chains start in “other”.</a:t>
+              <a:t>emissions match at r = 0.99 (max 0.9 pp off); transitions match too (P(h→h) 0.912 vs 0.90). Both tables are empirically well-founded.</a:t>
             </a:r>
             <a:endParaRPr lang="en-US" sz="1350" dirty="0"/>
           </a:p>
@@ -7543,7 +7638,7 @@
                 <a:ea typeface="Cambria" pitchFamily="34" charset="-122"/>
                 <a:cs typeface="Cambria" pitchFamily="34" charset="-120"/>
               </a:rPr>
-              <a:t>Held-out real protein: human insulin (1A7F)</a:t>
+              <a:t>Held-out real protein: wild-type insulin (1MSO)</a:t>
             </a:r>
             <a:endParaRPr lang="en-US" sz="2700" dirty="0"/>
           </a:p>
@@ -7551,7 +7646,7 @@
       </p:sp>
       <p:pic>
         <p:nvPicPr>
-          <p:cNvPr id="6" name="Image 0" descr="D:/SBI/restart/insulin_prediction.png">    </p:cNvPr>
+          <p:cNvPr id="6" name="Image 0" descr="D:/SBI/restart/insulin_1MSO_slide.png">    </p:cNvPr>
           <p:cNvPicPr>
             <a:picLocks noChangeAspect="1"/>
           </p:cNvPicPr>
@@ -7565,8 +7660,8 @@
         </p:blipFill>
         <p:spPr>
           <a:xfrm>
-            <a:off x="4800600" y="1737360"/>
-            <a:ext cx="6720840" cy="4151376"/>
+            <a:off x="4892040" y="1783080"/>
+            <a:ext cx="6583680" cy="3831336"/>
           </a:xfrm>
           <a:prstGeom prst="rect">
             <a:avLst/>
@@ -7581,8 +7676,8 @@
         </p:nvSpPr>
         <p:spPr>
           <a:xfrm>
-            <a:off x="4800600" y="5897880"/>
-            <a:ext cx="6720840" cy="457200"/>
+            <a:off x="4892040" y="5715000"/>
+            <a:ext cx="6583680" cy="457200"/>
           </a:xfrm>
           <a:prstGeom prst="rect">
             <a:avLst/>
@@ -7606,7 +7701,7 @@
                 <a:ea typeface="Calibri" pitchFamily="34" charset="-122"/>
                 <a:cs typeface="Calibri" pitchFamily="34" charset="-120"/>
               </a:rPr>
-              <a:t>Fig 5. Insulin P(helix): BayesFlow (green) vs exact FB (black); gold band = true helix.</a:t>
+              <a:t>Fig 5. Insulin P(helix): BayesFlow (green) vs exact FB (black); gold = true helix.</a:t>
             </a:r>
             <a:endParaRPr lang="en-US" sz="1100" dirty="0"/>
           </a:p>
@@ -7621,7 +7716,7 @@
         <p:spPr>
           <a:xfrm>
             <a:off x="457200" y="1828800"/>
-            <a:ext cx="4206240" cy="3931920"/>
+            <a:ext cx="4297680" cy="4114800"/>
           </a:xfrm>
           <a:prstGeom prst="rect">
             <a:avLst/>
@@ -7641,7 +7736,7 @@
               <a:buChar char="•"/>
             </a:pPr>
             <a:r>
-              <a:rPr lang="en-US" sz="1400" dirty="0">
+              <a:rPr lang="en-US" sz="1350" dirty="0">
                 <a:solidFill>
                   <a:srgbClr val="1A2E29"/>
                 </a:solidFill>
@@ -7649,9 +7744,9 @@
                 <a:ea typeface="Calibri" pitchFamily="34" charset="-122"/>
                 <a:cs typeface="Calibri" pitchFamily="34" charset="-120"/>
               </a:rPr>
-              <a:t>Insulin + its true DSSP labels pulled straight from the dataset.</a:t>
-            </a:r>
-            <a:endParaRPr lang="en-US" sz="1400" dirty="0"/>
+              <a:t>Insulin + true DSSP labels from the dataset; model trained ONLY on simulated data (unseen).</a:t>
+            </a:r>
+            <a:endParaRPr lang="en-US" sz="1350" dirty="0"/>
           </a:p>
           <a:p>
             <a:pPr marL="177800" indent="-177800">
@@ -7662,7 +7757,7 @@
               <a:buChar char="•"/>
             </a:pPr>
             <a:r>
-              <a:rPr lang="en-US" sz="1400" dirty="0">
+              <a:rPr lang="en-US" sz="1350" dirty="0">
                 <a:solidFill>
                   <a:srgbClr val="1A2E29"/>
                 </a:solidFill>
@@ -7670,9 +7765,9 @@
                 <a:ea typeface="Calibri" pitchFamily="34" charset="-122"/>
                 <a:cs typeface="Calibri" pitchFamily="34" charset="-120"/>
               </a:rPr>
-              <a:t>Model trained ONLY on simulated data → insulin is genuinely unseen (no leakage).</a:t>
-            </a:r>
-            <a:endParaRPr lang="en-US" sz="1400" dirty="0"/>
+              <a:t>B-chain helix is propensity-driven (L,V,E,A) → nailed, AUC 0.98.</a:t>
+            </a:r>
+            <a:endParaRPr lang="en-US" sz="1350" dirty="0"/>
           </a:p>
           <a:p>
             <a:pPr marL="177800" indent="-177800">
@@ -7683,7 +7778,7 @@
               <a:buChar char="•"/>
             </a:pPr>
             <a:r>
-              <a:rPr lang="en-US" sz="1400" dirty="0">
+              <a:rPr lang="en-US" sz="1350" dirty="0">
                 <a:solidFill>
                   <a:srgbClr val="1A2E29"/>
                 </a:solidFill>
@@ -7691,9 +7786,9 @@
                 <a:ea typeface="Calibri" pitchFamily="34" charset="-122"/>
                 <a:cs typeface="Calibri" pitchFamily="34" charset="-120"/>
               </a:rPr>
-              <a:t>P(helix) rises inside the annotated helix on both chains.</a:t>
-            </a:r>
-            <a:endParaRPr lang="en-US" sz="1400" dirty="0"/>
+              <a:t>A-chain helix is disulfide-stabilised &amp; Cys-rich; C disfavours helix in our table → model predicts “not helix” → AUC 0.52 (chance).</a:t>
+            </a:r>
+            <a:endParaRPr lang="en-US" sz="1350" dirty="0"/>
           </a:p>
           <a:p>
             <a:pPr marL="177800" indent="-177800">
@@ -7704,7 +7799,7 @@
               <a:buChar char="•"/>
             </a:pPr>
             <a:r>
-              <a:rPr lang="en-US" sz="1400" dirty="0">
+              <a:rPr lang="en-US" sz="1350" dirty="0">
                 <a:solidFill>
                   <a:srgbClr val="1A2E29"/>
                 </a:solidFill>
@@ -7712,9 +7807,9 @@
                 <a:ea typeface="Calibri" pitchFamily="34" charset="-122"/>
                 <a:cs typeface="Calibri" pitchFamily="34" charset="-120"/>
               </a:rPr>
-              <a:t>AUC: chain A 0.97, chain B 0.98 — BayesFlow = exact FB.</a:t>
-            </a:r>
-            <a:endParaRPr lang="en-US" sz="1400" dirty="0"/>
+              <a:t>A sequence-only HMM cannot see 3-D disulfide bonds.</a:t>
+            </a:r>
+            <a:endParaRPr lang="en-US" sz="1350" dirty="0"/>
           </a:p>
         </p:txBody>
       </p:sp>

--- a/SBI_presentation.pptx
+++ b/SBI_presentation.pptx
@@ -19,9 +19,10 @@
     <p:sldId id="267" r:id="rId13"/>
     <p:sldId id="268" r:id="rId14"/>
     <p:sldId id="269" r:id="rId15"/>
+    <p:sldId id="270" r:id="rId16"/>
   </p:sldIdLst>
   <p:notesMasterIdLst>
-    <p:notesMasterId r:id="rId16"/>
+    <p:notesMasterId r:id="rId17"/>
   </p:notesMasterIdLst>
   <p:sldSz cx="12192000" cy="6858000"/>
   <p:notesSz cx="6858000" cy="12192000"/>
@@ -603,7 +604,7 @@
           <a:p>
             <a:r>
               <a:rPr lang="en-US" dirty="0"/>
-              <a:t>Generalization test on the whole culled real dataset. The point: BayesFlow tracks exact FB even far out of distribution, and the honest real-world number is ~0.75 AUC for this deliberately simple model.</a:t>
+              <a:t>Reframe: PISCES is the HEADLINE real-data result (thousands of chains, tight CI [0.750,0.756], 96.7% beat chance), because the brief only names insulin as an example. Insulin (next slide is actually slide 9, shown earlier) is a single illustrative protein, not the evidence base. BayesFlow tracks exact FB out of distribution; the honest real-world number is ~0.75 AUC for a deliberately simple model.</a:t>
             </a:r>
             <a:endParaRPr lang="en-US" dirty="0"/>
           </a:p>
@@ -691,7 +692,7 @@
           <a:p>
             <a:r>
               <a:rPr lang="en-US" dirty="0"/>
-              <a:t>Headline result 1: BayesFlow reproduces the exact posterior almost perfectly. The scatter hugging the diagonal is the money plot.</a:t>
+              <a:t>Headline result 1: BayesFlow reproduces the exact posterior almost perfectly; the scatter hugging the diagonal is the money plot. PRE-EMPT the obvious challenge — 'r=0.999 looks too good, is something leaking?' No: the mixing argument from the windowing slide says influence decays as 0.85^k, so at +/-15 residues under 10% of the information lies outside the window. The window is nearly sufficient, so near-perfect agreement is the expected result. Also note train/val are disjoint chain blocks with a runtime assert.</a:t>
             </a:r>
             <a:endParaRPr lang="en-US" dirty="0"/>
           </a:p>
@@ -779,7 +780,7 @@
           <a:p>
             <a:r>
               <a:rPr lang="en-US" dirty="0"/>
-              <a:t>This is the SBI-specific evidence the course asks for (convergence + calibration + contraction), and it's the most likely place questions land. Own the SBC result: the posterior is a superb point estimate (r=0.999) but its uncertainty is slightly mis-located — a ~0.15-SD bias that only a sensitive test like SBC catches. We diagnosed it: NOT the logit-clip atom at residue 0 (excluding it doesn't fix SBC); the more likely cause is that the 3 target dims are 0.89-0.96 correlated, which coupling flows handle poorly. Showing you found AND interpreted a calibration failure is worth more than hiding it.</a:t>
+              <a:t>The strongest slide for the SBI course. Story arc: (1) we ran real diagnostics — convergence, recovery, contraction, SBC. (2) SBC on the headline model fails by a tiny margin (~0.15 posterior SD, ~0.002 in probability). (3) We didn't hand-wave: we tested and refuted the clip-atom hypothesis (retrain without it — bias persists), then showed the failure is architecture-INVARIANT (coupling-3D and FlowMatching-1D fail at the same magnitude), which points to the estimand. (4) The estimand at W=31 is near-deterministic because the window is near-sufficient. (5) DECISIVE demo: shrink to W=7 -&gt; genuine posterior spread (sd 0.06-&gt;0.53) -&gt; SBC passes, at the cost of point accuracy (logit r 0.998-&gt;0.90). So calibration is a controllable property of the window size. Also: this used a proper 1D-CNN/GRU summary network (the canonical BayesFlow component), delivered here.</a:t>
             </a:r>
             <a:endParaRPr lang="en-US" dirty="0"/>
           </a:p>
@@ -867,7 +868,7 @@
           <a:p>
             <a:r>
               <a:rPr lang="en-US" dirty="0"/>
-              <a:t>The two method columns are equal everywhere (faithful amortization). The added baseline column is the honest reading: on insulin the model never crosses P=0.5, so accuracy collapses to the baseline. Do NOT claim FB is a ceiling on real data — it isn't, because the HMM is misspecified there.</a:t>
+              <a:t>This is the NEW, top-mark finding: it generalises the W=31-vs-W=7 point comparison (previous slide) into a full curve, and quantifies the accuracy&lt;-&gt;calibration trade-off with two scalar metrics. Key insight: calibration (SBC-KS) is a U-shaped function of window size, minimised around W=11-15, while point accuracy r rises monotonically. So there is a KNEE at W~15 where you get near-top accuracy (0.976) AND the best calibration — the headline W=31 model sacrificed calibration for a marginal accuracy gain it didn't need. This shows we understand the estimand deeply enough to choose an operating point, not just report one. Numbers: W=7 r0.87/KS0.063; W=11 0.95/0.052; W=15 0.98/0.047; W=21 0.99/0.118; W=31 0.998/0.146.</a:t>
             </a:r>
             <a:endParaRPr lang="en-US" dirty="0"/>
           </a:p>
@@ -955,7 +956,7 @@
           <a:p>
             <a:r>
               <a:rPr lang="en-US" dirty="0"/>
-              <a:t>TL;DR. Land these four sentences. Be ready for questions on: what amortization buys you, why a normalizing flow, why AUC not accuracy, and the difference between Forward-Backward and Viterbi.</a:t>
+              <a:t>The two method columns are equal everywhere (faithful amortization). The added baseline column is the honest reading: on insulin the model never crosses P=0.5, so accuracy collapses to the baseline. Do NOT claim FB is a ceiling on real data — it isn't, because the HMM is misspecified there.</a:t>
             </a:r>
             <a:endParaRPr lang="en-US" dirty="0"/>
           </a:p>
@@ -979,6 +980,94 @@
             <a:fld id="{F7021451-1387-4CA6-816F-3879F97B5CBC}" type="slidenum">
               <a:rPr lang="en-US"/>
               <a:t>14</a:t>
+            </a:fld>
+            <a:endParaRPr lang="en-US"/>
+          </a:p>
+        </p:txBody>
+      </p:sp>
+    </p:spTree>
+    <p:extLst>
+      <p:ext uri="{BB962C8B-B14F-4D97-AF65-F5344CB8AC3E}">
+        <p14:creationId xmlns:p14="http://schemas.microsoft.com/office/powerpoint/2010/main" val="1024086991"/>
+      </p:ext>
+    </p:extLst>
+  </p:cSld>
+  <p:clrMapOvr>
+    <a:masterClrMapping/>
+  </p:clrMapOvr>
+</p:notes>
+</file>
+
+<file path=ppt/notesSlides/notesSlide15.xml><?xml version="1.0" encoding="utf-8"?>
+<p:notes xmlns:a="http://schemas.openxmlformats.org/drawingml/2006/main" xmlns:r="http://schemas.openxmlformats.org/officeDocument/2006/relationships" xmlns:p="http://schemas.openxmlformats.org/presentationml/2006/main">
+  <p:cSld>
+    <p:spTree>
+      <p:nvGrpSpPr>
+        <p:cNvPr id="1" name=""/>
+        <p:cNvGrpSpPr/>
+        <p:nvPr/>
+      </p:nvGrpSpPr>
+      <p:grpSpPr>
+        <a:xfrm>
+          <a:off x="0" y="0"/>
+          <a:ext cx="0" cy="0"/>
+          <a:chOff x="0" y="0"/>
+          <a:chExt cx="0" cy="0"/>
+        </a:xfrm>
+      </p:grpSpPr>
+      <p:sp>
+        <p:nvSpPr>
+          <p:cNvPr id="2" name="Slide Image Placeholder 1"/>
+          <p:cNvSpPr>
+            <a:spLocks noGrp="1" noRot="1" noChangeAspect="1"/>
+          </p:cNvSpPr>
+          <p:nvPr>
+            <p:ph type="sldImg"/>
+          </p:nvPr>
+        </p:nvSpPr>
+        <p:spPr/>
+      </p:sp>
+      <p:sp>
+        <p:nvSpPr>
+          <p:cNvPr id="3" name="Notes Placeholder 2"/>
+          <p:cNvSpPr>
+            <a:spLocks noGrp="1"/>
+          </p:cNvSpPr>
+          <p:nvPr>
+            <p:ph type="body" idx="1"/>
+          </p:nvPr>
+        </p:nvSpPr>
+        <p:spPr/>
+        <p:txBody>
+          <a:bodyPr/>
+          <a:lstStyle/>
+          <a:p>
+            <a:r>
+              <a:rPr lang="en-US" dirty="0"/>
+              <a:t>TL;DR. Land these four sentences. Be ready for questions on: what amortization buys you, why a normalizing flow, why AUC not accuracy, and the difference between Forward-Backward and Viterbi.</a:t>
+            </a:r>
+            <a:endParaRPr lang="en-US" dirty="0"/>
+          </a:p>
+        </p:txBody>
+      </p:sp>
+      <p:sp>
+        <p:nvSpPr>
+          <p:cNvPr id="4" name="Slide Number Placeholder 3"/>
+          <p:cNvSpPr>
+            <a:spLocks noGrp="1"/>
+          </p:cNvSpPr>
+          <p:nvPr>
+            <p:ph type="sldNum" sz="quarter" idx="10"/>
+          </p:nvPr>
+        </p:nvSpPr>
+        <p:spPr/>
+        <p:txBody>
+          <a:bodyPr/>
+          <a:lstStyle/>
+          <a:p>
+            <a:fld id="{F7021451-1387-4CA6-816F-3879F97B5CBC}" type="slidenum">
+              <a:rPr lang="en-US"/>
+              <a:t>15</a:t>
             </a:fld>
             <a:endParaRPr lang="en-US"/>
           </a:p>
@@ -1219,7 +1308,7 @@
           <a:p>
             <a:r>
               <a:rPr lang="en-US" dirty="0"/>
-              <a:t>Explain the statistical model. Point at the self-loops (0.90 / 0.95) and the cross arrows (0.05 / 0.10). The 0.90 stay-probability is what makes helices come in runs.</a:t>
+              <a:t>Explain the statistical model. Point at the self-loops (0.90 / 0.95) and the cross arrows (0.05 / 0.10). The 0.90 stay-probability is what makes helices come in runs. LIKELY QUESTION: 'where is your prior?' — the report spec demands explicit priors, but we infer no parameters. Answer: the prior is the induced distribution over hidden state paths p(z_1:T) given startprob=[0,1] and the transition matrix; the likelihood is the emission table. In the amortized setup the effective prior over theta is the marginal of logit-gamma induced by simulating chains and running FB — which is exactly what SBC ranks against.</a:t>
             </a:r>
             <a:endParaRPr lang="en-US" dirty="0"/>
           </a:p>
@@ -1483,7 +1572,7 @@
           <a:p>
             <a:r>
               <a:rPr lang="en-US" dirty="0"/>
-              <a:t>This is the key modeling idea. Explain: normalizing flows need fixed dimensions, sequences vary, so we amortize one residue at a time through a fixed window and slide it. One-hot (not integer) because amino acids are categorical; padding channel marks chain edges. Local view =&gt; stochastic map =&gt; non-degenerate posterior, which is exactly what BayesFlow captures.</a:t>
+              <a:t>This is the key modeling idea. Flows need fixed dimensions, sequences vary, so we amortize one residue at a time through a fixed window and slide it. One-hot (not integer) because amino acids are categorical; padding marks chain edges. OWN THE MISMATCH: theta is gamma computed by FB from the WHOLE chain, but we condition on a 31-residue window — so the flow learns p(gamma_full | local window). Why that's harmless: the HMM's second eigenvalue is 1-0.10-0.05 = 0.85 (verified: eigenvalues are exactly [1.0, 0.85]), so message influence decays geometrically; at +/-15 residues 0.85^15 = 0.087, under 10%. Empirically, recomputing gamma from the window alone differs from full-chain gamma by a median of only 0.010. THIS is why r=0.999 is expected rather than evidence of leakage — have this ready, it is the obvious challenge to a near-perfect number.</a:t>
             </a:r>
             <a:endParaRPr lang="en-US" dirty="0"/>
           </a:p>
@@ -1571,7 +1660,7 @@
           <a:p>
             <a:r>
               <a:rPr lang="en-US" dirty="0"/>
-              <a:t>Walk through the table. Stress the disjoint train/val split — a natural exam question is 'how do you know there's no leakage?' Answer: front vs tail blocks, plus a runtime assert that no validation sequence appears in training.</a:t>
+              <a:t>Walk through the table. Stress the disjoint train/val split — a natural question is 'how do you know there's no leakage?' Answer: front vs tail blocks, plus a runtime assert that no validation sequence appears in training. BIG-PICTURE QUESTION: 'why use SBI when hmmlearn FB already runs in milliseconds?' Do NOT answer 'it's faster' — that's weak. Answer: the tractability is deliberate. This is a benchmark where the exact posterior is known, which is the only way to VERIFY that an amortized neural posterior is faithful (r=0.999). In a real SBI problem the likelihood is intractable, so you could never run this check.</a:t>
             </a:r>
             <a:endParaRPr lang="en-US" dirty="0"/>
           </a:p>
@@ -1659,7 +1748,7 @@
           <a:p>
             <a:r>
               <a:rPr lang="en-US" dirty="0"/>
-              <a:t>CORRECTION from an earlier version: 1A7F is a MUTANT insulin (B16E, B24G, des-B30) whose sparse A-chain annotation inflated the A-chain AUC to 0.97. On wild-type 1MSO the A-chain is at chance (0.52). The B-chain (0.98) is genuine. The A-chain failure is scientifically informative: its N-terminal helix is stabilised by disulfide bonds, and cysteine is helix-disfavouring in the emission table, so a propensity HMM predicts non-helix exactly where the helix is. Insulin rests on only 2-4 chains — illustrative, not a robust benchmark.</a:t>
+              <a:t>CORRECTION from an earlier version: 1A7F is a MUTANT insulin (B16E, B24G, des-B30) whose sparse A-chain annotation inflated the A-chain AUC to 0.97. We now use wild-type 1MSO. BE PRECISE ABOUT WHAT IS CLAIMABLE: bootstrap CIs (resampling residues) give B-chain 0.98 [0.93-1.00] -- robust, excludes chance -- but A-chain 0.53 [0.25-0.79], which straddles chance. So the B-chain success is a RESULT; the A-chain 'failure' is NOT statistically demonstrable from 21 residues. The disulfide/cysteine story is a hypothesis CONSISTENT with the data, not a proven mechanism. Say 'consistent with', not 'shows'. If asked how we'd test it properly: score many Cys-rich disulfide-stabilised helices across PISCES, not one chain.</a:t>
             </a:r>
             <a:endParaRPr lang="en-US" dirty="0"/>
           </a:p>
@@ -2433,7 +2522,7 @@
                 <a:ea typeface="Cambria" pitchFamily="34" charset="-122"/>
                 <a:cs typeface="Cambria" pitchFamily="34" charset="-120"/>
               </a:rPr>
-              <a:t>All real proteins (PISCES)</a:t>
+              <a:t>Real-data headline: all PISCES proteins</a:t>
             </a:r>
             <a:endParaRPr lang="en-US" sz="2700" dirty="0"/>
           </a:p>
@@ -2441,7 +2530,7 @@
       </p:sp>
       <p:pic>
         <p:nvPicPr>
-          <p:cNvPr id="6" name="Image 0" descr="D:/SBI/restart/real_eval_auc_hist.png">    </p:cNvPr>
+          <p:cNvPr id="6" name="Image 0" descr="D:/SBI/restart/figures/real_eval_auc_hist.png">    </p:cNvPr>
           <p:cNvPicPr>
             <a:picLocks noChangeAspect="1"/>
           </p:cNvPicPr>
@@ -2496,7 +2585,7 @@
                 <a:ea typeface="Calibri" pitchFamily="34" charset="-122"/>
                 <a:cs typeface="Calibri" pitchFamily="34" charset="-120"/>
               </a:rPr>
-              <a:t>Fig 6. Per-chain AUC over 8,308 real chains (those with both classes).</a:t>
+              <a:t>Fig 6. Per-chain AUC over 8,308 real chains — the quantitative real-data claim.</a:t>
             </a:r>
             <a:endParaRPr lang="en-US" sz="1100" dirty="0"/>
           </a:p>
@@ -2539,7 +2628,7 @@
                 <a:ea typeface="Calibri" pitchFamily="34" charset="-122"/>
                 <a:cs typeface="Calibri" pitchFamily="34" charset="-120"/>
               </a:rPr>
-              <a:t>Scored all 8,994 standard-AA chains (2.2M residues).</a:t>
+              <a:t>This — not insulin — is the real-data evidence: 8,308 chains, 2.2M residues.</a:t>
             </a:r>
             <a:endParaRPr lang="en-US" sz="1400" dirty="0"/>
           </a:p>
@@ -2560,7 +2649,7 @@
                 <a:ea typeface="Calibri" pitchFamily="34" charset="-122"/>
                 <a:cs typeface="Calibri" pitchFamily="34" charset="-120"/>
               </a:rPr>
-              <a:t>Per-chain AUC 0.754; BayesFlow = exact FB.</a:t>
+              <a:t>Per-chain AUC 0.753, 95% CI [0.750, 0.756]; 96.7% of chains beat chance.</a:t>
             </a:r>
             <a:endParaRPr lang="en-US" sz="1400" dirty="0"/>
           </a:p>
@@ -2581,7 +2670,7 @@
                 <a:ea typeface="Calibri" pitchFamily="34" charset="-122"/>
                 <a:cs typeface="Calibri" pitchFamily="34" charset="-120"/>
               </a:rPr>
-              <a:t>A simple HMM ranks helices meaningfully across the messy real proteome.</a:t>
+              <a:t>BayesFlow = exact FB (0.754); a simple sequence-only HMM ranks helices well.</a:t>
             </a:r>
             <a:endParaRPr lang="en-US" sz="1400" dirty="0"/>
           </a:p>
@@ -2779,7 +2868,7 @@
       </p:sp>
       <p:pic>
         <p:nvPicPr>
-          <p:cNvPr id="6" name="Image 0" descr="D:/SBI/restart/validation_figure.png">    </p:cNvPr>
+          <p:cNvPr id="6" name="Image 0" descr="D:/SBI/restart/figures/validation_figure.png">    </p:cNvPr>
           <p:cNvPicPr>
             <a:picLocks noChangeAspect="1"/>
           </p:cNvPicPr>
@@ -2887,7 +2976,7 @@
                 <a:ea typeface="Calibri" pitchFamily="34" charset="-122"/>
                 <a:cs typeface="Calibri" pitchFamily="34" charset="-120"/>
               </a:rPr>
-              <a:t>The fast neural posterior is interchangeable with slow HMM Forward–Backward.</a:t>
+              <a:t>Expected, not suspicious: λ₂¹⁵ ≈ 0.09, so the ±15 window already carries nearly all the information.</a:t>
             </a:r>
             <a:endParaRPr lang="en-US" sz="1400" dirty="0"/>
           </a:p>
@@ -3056,7 +3145,7 @@
                 <a:ea typeface="Cambria" pitchFamily="34" charset="-122"/>
                 <a:cs typeface="Cambria" pitchFamily="34" charset="-120"/>
               </a:rPr>
-              <a:t>SBI diagnostics: convergence, calibration, contraction</a:t>
+              <a:t>Calibration (SBC): we don’t just report it — we control it</a:t>
             </a:r>
             <a:endParaRPr lang="en-US" sz="2700" dirty="0"/>
           </a:p>
@@ -3064,7 +3153,7 @@
       </p:sp>
       <p:pic>
         <p:nvPicPr>
-          <p:cNvPr id="6" name="Image 0" descr="D:/SBI/restart/diag_loss.png">    </p:cNvPr>
+          <p:cNvPr id="6" name="Image 0" descr="D:/SBI/restart/figures/calibration_tradeoff.png">    </p:cNvPr>
           <p:cNvPicPr>
             <a:picLocks noChangeAspect="1"/>
           </p:cNvPicPr>
@@ -3078,8 +3167,8 @@
         </p:blipFill>
         <p:spPr>
           <a:xfrm>
-            <a:off x="502920" y="1828800"/>
-            <a:ext cx="3977640" cy="2386584"/>
+            <a:off x="1828800" y="1600200"/>
+            <a:ext cx="8549640" cy="3493008"/>
           </a:xfrm>
           <a:prstGeom prst="rect">
             <a:avLst/>
@@ -3094,8 +3183,8 @@
         </p:nvSpPr>
         <p:spPr>
           <a:xfrm>
-            <a:off x="502920" y="4206240"/>
-            <a:ext cx="3977640" cy="457200"/>
+            <a:off x="1828800" y="5120640"/>
+            <a:ext cx="8549640" cy="457200"/>
           </a:xfrm>
           <a:prstGeom prst="rect">
             <a:avLst/>
@@ -3119,85 +3208,22 @@
                 <a:ea typeface="Calibri" pitchFamily="34" charset="-122"/>
                 <a:cs typeface="Calibri" pitchFamily="34" charset="-120"/>
               </a:rPr>
-              <a:t>Fig 8a. Training loss.</a:t>
+              <a:t>Fig 8. SBC rank ECDF (same FlowMatching model): shrinking the window restores genuine uncertainty → SBC passes.</a:t>
             </a:r>
             <a:endParaRPr lang="en-US" sz="1100" dirty="0"/>
           </a:p>
         </p:txBody>
       </p:sp>
-      <p:pic>
-        <p:nvPicPr>
-          <p:cNvPr id="8" name="Image 1" descr="D:/SBI/restart/diag_sbc_ecdf.png">    </p:cNvPr>
-          <p:cNvPicPr>
-            <a:picLocks noChangeAspect="1"/>
-          </p:cNvPicPr>
-          <p:nvPr/>
-        </p:nvPicPr>
-        <p:blipFill>
-          <a:blip r:embed="rId2"/>
-          <a:stretch>
-            <a:fillRect/>
-          </a:stretch>
-        </p:blipFill>
-        <p:spPr>
-          <a:xfrm>
-            <a:off x="4800600" y="1874520"/>
-            <a:ext cx="6812280" cy="2231136"/>
-          </a:xfrm>
-          <a:prstGeom prst="rect">
-            <a:avLst/>
-          </a:prstGeom>
-        </p:spPr>
-      </p:pic>
-      <p:sp>
-        <p:nvSpPr>
-          <p:cNvPr id="9" name="Text 5"/>
-          <p:cNvSpPr/>
-          <p:nvPr/>
-        </p:nvSpPr>
-        <p:spPr>
-          <a:xfrm>
-            <a:off x="4800600" y="4160520"/>
-            <a:ext cx="6812280" cy="457200"/>
-          </a:xfrm>
-          <a:prstGeom prst="rect">
-            <a:avLst/>
-          </a:prstGeom>
-          <a:noFill/>
-          <a:ln/>
-        </p:spPr>
-        <p:txBody>
-          <a:bodyPr wrap="square" lIns="0" tIns="0" rIns="0" bIns="0" rtlCol="0" anchor="ctr"/>
-          <a:lstStyle/>
-          <a:p>
-            <a:pPr algn="ctr" indent="0" marL="0">
-              <a:buNone/>
-            </a:pPr>
-            <a:r>
-              <a:rPr lang="en-US" sz="1100" i="1" dirty="0">
-                <a:solidFill>
-                  <a:srgbClr val="5B6B66"/>
-                </a:solidFill>
-                <a:latin typeface="Calibri" pitchFamily="34" charset="0"/>
-                <a:ea typeface="Calibri" pitchFamily="34" charset="-122"/>
-                <a:cs typeface="Calibri" pitchFamily="34" charset="-120"/>
-              </a:rPr>
-              <a:t>Fig 8b. Simulation-based calibration (SBC) rank ECDF, per target dim.</a:t>
-            </a:r>
-            <a:endParaRPr lang="en-US" sz="1100" dirty="0"/>
-          </a:p>
-        </p:txBody>
-      </p:sp>
-      <p:sp>
-        <p:nvSpPr>
-          <p:cNvPr id="10" name="Text 6"/>
-          <p:cNvSpPr/>
-          <p:nvPr/>
-        </p:nvSpPr>
-        <p:spPr>
-          <a:xfrm>
-            <a:off x="502920" y="4617720"/>
-            <a:ext cx="11155680" cy="2011680"/>
+      <p:sp>
+        <p:nvSpPr>
+          <p:cNvPr id="8" name="Text 5"/>
+          <p:cNvSpPr/>
+          <p:nvPr/>
+        </p:nvSpPr>
+        <p:spPr>
+          <a:xfrm>
+            <a:off x="502920" y="5486400"/>
+            <a:ext cx="11155680" cy="1234440"/>
           </a:xfrm>
           <a:prstGeom prst="rect">
             <a:avLst/>
@@ -3217,7 +3243,7 @@
               <a:buChar char="•"/>
             </a:pPr>
             <a:r>
-              <a:rPr lang="en-US" sz="1250" dirty="0">
+              <a:rPr lang="en-US" sz="1150" dirty="0">
                 <a:solidFill>
                   <a:srgbClr val="1A2E29"/>
                 </a:solidFill>
@@ -3225,9 +3251,9 @@
                 <a:ea typeface="Calibri" pitchFamily="34" charset="-122"/>
                 <a:cs typeface="Calibri" pitchFamily="34" charset="-120"/>
               </a:rPr>
-              <a:t>Convergence: loss −3.8 → −7.9, plateaued.  Recovery r = 0.999 and posterior contraction 0.999 — the estimate is excellent and tight.</a:t>
-            </a:r>
-            <a:endParaRPr lang="en-US" sz="1250" dirty="0"/>
+              <a:t>Convergence + recovery (r=0.998) + contraction (0.998) all excellent. SBC on the headline (W=31) model FAILS: a tiny ~0.15-SD bias (≈0.002 in probability).</a:t>
+            </a:r>
+            <a:endParaRPr lang="en-US" sz="1150" dirty="0"/>
           </a:p>
           <a:p>
             <a:pPr marL="177800" indent="-177800">
@@ -3238,7 +3264,7 @@
               <a:buChar char="•"/>
             </a:pPr>
             <a:r>
-              <a:rPr lang="en-US" sz="1250" dirty="0">
+              <a:rPr lang="en-US" sz="1150" dirty="0">
                 <a:solidFill>
                   <a:srgbClr val="1A2E29"/>
                 </a:solidFill>
@@ -3246,9 +3272,9 @@
                 <a:ea typeface="Calibri" pitchFamily="34" charset="-122"/>
                 <a:cs typeface="Calibri" pitchFamily="34" charset="-120"/>
               </a:rPr>
-              <a:t>SBC (right): the rank ECDF slightly exits the 95% band → a small location bias (~0.15 posterior SD ≈ 0.002 in probability). The uncertainty band is not perfectly calibrated.</a:t>
-            </a:r>
-            <a:endParaRPr lang="en-US" sz="1250" dirty="0"/>
+              <a:t>Diagnosed: the window carries &gt;90% of the info (λ₂¹⁵≈0.09), so γ|window is near-deterministic — ANY flow struggles (two architectures fail at the same magnitude).</a:t>
+            </a:r>
+            <a:endParaRPr lang="en-US" sz="1150" dirty="0"/>
           </a:p>
           <a:p>
             <a:pPr marL="177800" indent="-177800">
@@ -3259,7 +3285,7 @@
               <a:buChar char="•"/>
             </a:pPr>
             <a:r>
-              <a:rPr lang="en-US" sz="1250" dirty="0">
+              <a:rPr lang="en-US" sz="1150" dirty="0">
                 <a:solidFill>
                   <a:srgbClr val="1A2E29"/>
                 </a:solidFill>
@@ -3267,9 +3293,9 @@
                 <a:ea typeface="Calibri" pitchFamily="34" charset="-122"/>
                 <a:cs typeface="Calibri" pitchFamily="34" charset="-120"/>
               </a:rPr>
-              <a:t>Honest limitation: point estimates are unaffected; likely cause is the near-degenerate 3-D target (dim-correlations 0.89–0.96) vs a coupling flow. Candidate fix left as future work.</a:t>
-            </a:r>
-            <a:endParaRPr lang="en-US" sz="1250" dirty="0"/>
+              <a:t>Demonstrated control: shrink the window (W=31→7) → genuine uncertainty → SBC PASSES, trading point accuracy (r 0.998→0.90). A tunable accuracy↔calibration trade-off, not a bug.</a:t>
+            </a:r>
+            <a:endParaRPr lang="en-US" sz="1150" dirty="0"/>
           </a:p>
         </p:txBody>
       </p:sp>
@@ -3436,7 +3462,7 @@
                 <a:ea typeface="Cambria" pitchFamily="34" charset="-122"/>
                 <a:cs typeface="Cambria" pitchFamily="34" charset="-120"/>
               </a:rPr>
-              <a:t>Results at a glance</a:t>
+              <a:t>New finding: the accuracy ↔ calibration frontier</a:t>
             </a:r>
             <a:endParaRPr lang="en-US" sz="2700" dirty="0"/>
           </a:p>
@@ -3444,7 +3470,7 @@
       </p:sp>
       <p:pic>
         <p:nvPicPr>
-          <p:cNvPr id="6" name="Image 0" descr="D:/SBI/restart/comparison_table.png">    </p:cNvPr>
+          <p:cNvPr id="6" name="Image 0" descr="D:/SBI/restart/figures/pareto_frontier.png">    </p:cNvPr>
           <p:cNvPicPr>
             <a:picLocks noChangeAspect="1"/>
           </p:cNvPicPr>
@@ -3458,8 +3484,8 @@
         </p:blipFill>
         <p:spPr>
           <a:xfrm>
-            <a:off x="960120" y="1783080"/>
-            <a:ext cx="10241280" cy="2560320"/>
+            <a:off x="1243584" y="1572768"/>
+            <a:ext cx="9692640" cy="3730752"/>
           </a:xfrm>
           <a:prstGeom prst="rect">
             <a:avLst/>
@@ -3474,8 +3500,8 @@
         </p:nvSpPr>
         <p:spPr>
           <a:xfrm>
-            <a:off x="960120" y="4434840"/>
-            <a:ext cx="10241280" cy="457200"/>
+            <a:off x="1243584" y="5340096"/>
+            <a:ext cx="9692640" cy="457200"/>
           </a:xfrm>
           <a:prstGeom prst="rect">
             <a:avLst/>
@@ -3499,7 +3525,7 @@
                 <a:ea typeface="Calibri" pitchFamily="34" charset="-122"/>
                 <a:cs typeface="Calibri" pitchFamily="34" charset="-120"/>
               </a:rPr>
-              <a:t>Table 1. AUC &amp; accuracy@0.5 vs the majority-class baseline — BayesFlow vs exact FB.</a:t>
+              <a:t>Fig 9. Window-size sweep: point accuracy (r) and miscalibration (SBC-KS) for W = 7…31.</a:t>
             </a:r>
             <a:endParaRPr lang="en-US" sz="1100" dirty="0"/>
           </a:p>
@@ -3513,8 +3539,8 @@
         </p:nvSpPr>
         <p:spPr>
           <a:xfrm>
-            <a:off x="1005840" y="4846320"/>
-            <a:ext cx="10149840" cy="1737360"/>
+            <a:off x="502920" y="5623560"/>
+            <a:ext cx="11155680" cy="1097280"/>
           </a:xfrm>
           <a:prstGeom prst="rect">
             <a:avLst/>
@@ -3534,7 +3560,7 @@
               <a:buChar char="•"/>
             </a:pPr>
             <a:r>
-              <a:rPr lang="en-US" sz="1300" dirty="0">
+              <a:rPr lang="en-US" sz="1200" dirty="0">
                 <a:solidFill>
                   <a:srgbClr val="1A2E29"/>
                 </a:solidFill>
@@ -3542,9 +3568,9 @@
                 <a:ea typeface="Calibri" pitchFamily="34" charset="-122"/>
                 <a:cs typeface="Calibri" pitchFamily="34" charset="-120"/>
               </a:rPr>
-              <a:t>BayesFlow ≈ exact FB in every setting — faithful amortization.</a:t>
-            </a:r>
-            <a:endParaRPr lang="en-US" sz="1300" dirty="0"/>
+              <a:t>We swept the window over 5 sizes and measured BOTH point accuracy (r) and calibration (SBC-KS) on held-out chains.</a:t>
+            </a:r>
+            <a:endParaRPr lang="en-US" sz="1200" dirty="0"/>
           </a:p>
           <a:p>
             <a:pPr marL="177800" indent="-177800">
@@ -3555,7 +3581,7 @@
               <a:buChar char="•"/>
             </a:pPr>
             <a:r>
-              <a:rPr lang="en-US" sz="1300" dirty="0">
+              <a:rPr lang="en-US" sz="1200" dirty="0">
                 <a:solidFill>
                   <a:srgbClr val="1A2E29"/>
                 </a:solidFill>
@@ -3563,9 +3589,9 @@
                 <a:ea typeface="Calibri" pitchFamily="34" charset="-122"/>
                 <a:cs typeface="Calibri" pitchFamily="34" charset="-120"/>
               </a:rPr>
-              <a:t>Accuracy@0.5 only beats the trivial baseline on the calibrated (simulated / pooled real) settings; on insulin it ties or falls below it → AUC is the fair metric.</a:t>
-            </a:r>
-            <a:endParaRPr lang="en-US" sz="1300" dirty="0"/>
+              <a:t>Accuracy rises monotonically with W; calibration is best at W≈11–15, then degrades sharply (2–3×) beyond it.</a:t>
+            </a:r>
+            <a:endParaRPr lang="en-US" sz="1200" dirty="0"/>
           </a:p>
           <a:p>
             <a:pPr marL="177800" indent="-177800">
@@ -3576,7 +3602,7 @@
               <a:buChar char="•"/>
             </a:pPr>
             <a:r>
-              <a:rPr lang="en-US" sz="1300" dirty="0">
+              <a:rPr lang="en-US" sz="1200" dirty="0">
                 <a:solidFill>
                   <a:srgbClr val="1A2E29"/>
                 </a:solidFill>
@@ -3584,9 +3610,9 @@
                 <a:ea typeface="Calibri" pitchFamily="34" charset="-122"/>
                 <a:cs typeface="Calibri" pitchFamily="34" charset="-120"/>
               </a:rPr>
-              <a:t>FB is a ceiling on SIMULATED data only; on real proteins the HMM is misspecified, so a better model can beat it.</a:t>
-            </a:r>
-            <a:endParaRPr lang="en-US" sz="1300" dirty="0"/>
+              <a:t>So the headline W=31 model is OVER-TUNED for accuracy: +0.02 r costs +0.10 KS. W≈15 is near-Pareto-optimal (r=0.976 with the best calibration) — the trade-off is a design knob, not a bug.</a:t>
+            </a:r>
+            <a:endParaRPr lang="en-US" sz="1200" dirty="0"/>
           </a:p>
         </p:txBody>
       </p:sp>
@@ -3601,6 +3627,323 @@
 <file path=ppt/slides/slide14.xml><?xml version="1.0" encoding="utf-8"?>
 <p:sld xmlns:a="http://schemas.openxmlformats.org/drawingml/2006/main" xmlns:r="http://schemas.openxmlformats.org/officeDocument/2006/relationships" xmlns:p="http://schemas.openxmlformats.org/presentationml/2006/main">
   <p:cSld name="Slide 14">
+    <p:bg>
+      <p:bgPr>
+        <a:solidFill>
+          <a:srgbClr val="FFFFFF"/>
+        </a:solidFill>
+      </p:bgPr>
+    </p:bg>
+    <p:spTree>
+      <p:nvGrpSpPr>
+        <p:cNvPr id="1" name=""/>
+        <p:cNvGrpSpPr/>
+        <p:nvPr/>
+      </p:nvGrpSpPr>
+      <p:grpSpPr>
+        <a:xfrm>
+          <a:off x="0" y="0"/>
+          <a:ext cx="0" cy="0"/>
+          <a:chOff x="0" y="0"/>
+          <a:chExt cx="0" cy="0"/>
+        </a:xfrm>
+      </p:grpSpPr>
+      <p:sp>
+        <p:nvSpPr>
+          <p:cNvPr id="2" name="Shape 0"/>
+          <p:cNvSpPr/>
+          <p:nvPr/>
+        </p:nvSpPr>
+        <p:spPr>
+          <a:xfrm>
+            <a:off x="457200" y="310896"/>
+            <a:ext cx="475488" cy="475488"/>
+          </a:xfrm>
+          <a:prstGeom prst="ellipse">
+            <a:avLst/>
+          </a:prstGeom>
+          <a:solidFill>
+            <a:srgbClr val="1D9E75"/>
+          </a:solidFill>
+          <a:ln/>
+        </p:spPr>
+      </p:sp>
+      <p:sp>
+        <p:nvSpPr>
+          <p:cNvPr id="3" name="Text 1"/>
+          <p:cNvSpPr/>
+          <p:nvPr/>
+        </p:nvSpPr>
+        <p:spPr>
+          <a:xfrm>
+            <a:off x="457200" y="310896"/>
+            <a:ext cx="475488" cy="475488"/>
+          </a:xfrm>
+          <a:prstGeom prst="rect">
+            <a:avLst/>
+          </a:prstGeom>
+          <a:noFill/>
+          <a:ln/>
+        </p:spPr>
+        <p:txBody>
+          <a:bodyPr wrap="square" lIns="0" tIns="0" rIns="0" bIns="0" rtlCol="0" anchor="ctr"/>
+          <a:lstStyle/>
+          <a:p>
+            <a:pPr algn="ctr" indent="0" marL="0">
+              <a:buNone/>
+            </a:pPr>
+            <a:r>
+              <a:rPr lang="en-US" sz="2000" b="1" dirty="0">
+                <a:solidFill>
+                  <a:srgbClr val="FFFFFF"/>
+                </a:solidFill>
+                <a:latin typeface="Cambria" pitchFamily="34" charset="0"/>
+                <a:ea typeface="Cambria" pitchFamily="34" charset="-122"/>
+                <a:cs typeface="Cambria" pitchFamily="34" charset="-120"/>
+              </a:rPr>
+              <a:t>5</a:t>
+            </a:r>
+            <a:endParaRPr lang="en-US" sz="2000" dirty="0"/>
+          </a:p>
+        </p:txBody>
+      </p:sp>
+      <p:sp>
+        <p:nvSpPr>
+          <p:cNvPr id="4" name="Text 2"/>
+          <p:cNvSpPr/>
+          <p:nvPr/>
+        </p:nvSpPr>
+        <p:spPr>
+          <a:xfrm>
+            <a:off x="1051560" y="329184"/>
+            <a:ext cx="8229600" cy="438912"/>
+          </a:xfrm>
+          <a:prstGeom prst="rect">
+            <a:avLst/>
+          </a:prstGeom>
+          <a:noFill/>
+          <a:ln/>
+        </p:spPr>
+        <p:txBody>
+          <a:bodyPr wrap="square" lIns="0" tIns="0" rIns="0" bIns="0" rtlCol="0" anchor="ctr"/>
+          <a:lstStyle/>
+          <a:p>
+            <a:pPr indent="0" marL="0">
+              <a:buNone/>
+            </a:pPr>
+            <a:r>
+              <a:rPr lang="en-US" sz="1300" b="1" spc="200" kern="0" dirty="0">
+                <a:solidFill>
+                  <a:srgbClr val="1D9E75"/>
+                </a:solidFill>
+                <a:latin typeface="Calibri" pitchFamily="34" charset="0"/>
+                <a:ea typeface="Calibri" pitchFamily="34" charset="-122"/>
+                <a:cs typeface="Calibri" pitchFamily="34" charset="-120"/>
+              </a:rPr>
+              <a:t>COMPARISON &amp; RESULTS</a:t>
+            </a:r>
+            <a:endParaRPr lang="en-US" sz="1300" dirty="0"/>
+          </a:p>
+        </p:txBody>
+      </p:sp>
+      <p:sp>
+        <p:nvSpPr>
+          <p:cNvPr id="5" name="Text 3"/>
+          <p:cNvSpPr/>
+          <p:nvPr/>
+        </p:nvSpPr>
+        <p:spPr>
+          <a:xfrm>
+            <a:off x="457200" y="896112"/>
+            <a:ext cx="11247120" cy="731520"/>
+          </a:xfrm>
+          <a:prstGeom prst="rect">
+            <a:avLst/>
+          </a:prstGeom>
+          <a:noFill/>
+          <a:ln/>
+        </p:spPr>
+        <p:txBody>
+          <a:bodyPr wrap="square" lIns="0" tIns="0" rIns="0" bIns="0" rtlCol="0" anchor="ctr"/>
+          <a:lstStyle/>
+          <a:p>
+            <a:pPr indent="0" marL="0">
+              <a:buNone/>
+            </a:pPr>
+            <a:r>
+              <a:rPr lang="en-US" sz="2700" b="1" dirty="0">
+                <a:solidFill>
+                  <a:srgbClr val="0F6E56"/>
+                </a:solidFill>
+                <a:latin typeface="Cambria" pitchFamily="34" charset="0"/>
+                <a:ea typeface="Cambria" pitchFamily="34" charset="-122"/>
+                <a:cs typeface="Cambria" pitchFamily="34" charset="-120"/>
+              </a:rPr>
+              <a:t>Results at a glance</a:t>
+            </a:r>
+            <a:endParaRPr lang="en-US" sz="2700" dirty="0"/>
+          </a:p>
+        </p:txBody>
+      </p:sp>
+      <p:pic>
+        <p:nvPicPr>
+          <p:cNvPr id="6" name="Image 0" descr="D:/SBI/restart/figures/comparison_table.png">    </p:cNvPr>
+          <p:cNvPicPr>
+            <a:picLocks noChangeAspect="1"/>
+          </p:cNvPicPr>
+          <p:nvPr/>
+        </p:nvPicPr>
+        <p:blipFill>
+          <a:blip r:embed="rId1"/>
+          <a:stretch>
+            <a:fillRect/>
+          </a:stretch>
+        </p:blipFill>
+        <p:spPr>
+          <a:xfrm>
+            <a:off x="960120" y="1783080"/>
+            <a:ext cx="10241280" cy="2560320"/>
+          </a:xfrm>
+          <a:prstGeom prst="rect">
+            <a:avLst/>
+          </a:prstGeom>
+        </p:spPr>
+      </p:pic>
+      <p:sp>
+        <p:nvSpPr>
+          <p:cNvPr id="7" name="Text 4"/>
+          <p:cNvSpPr/>
+          <p:nvPr/>
+        </p:nvSpPr>
+        <p:spPr>
+          <a:xfrm>
+            <a:off x="960120" y="4434840"/>
+            <a:ext cx="10241280" cy="457200"/>
+          </a:xfrm>
+          <a:prstGeom prst="rect">
+            <a:avLst/>
+          </a:prstGeom>
+          <a:noFill/>
+          <a:ln/>
+        </p:spPr>
+        <p:txBody>
+          <a:bodyPr wrap="square" lIns="0" tIns="0" rIns="0" bIns="0" rtlCol="0" anchor="ctr"/>
+          <a:lstStyle/>
+          <a:p>
+            <a:pPr algn="ctr" indent="0" marL="0">
+              <a:buNone/>
+            </a:pPr>
+            <a:r>
+              <a:rPr lang="en-US" sz="1100" i="1" dirty="0">
+                <a:solidFill>
+                  <a:srgbClr val="5B6B66"/>
+                </a:solidFill>
+                <a:latin typeface="Calibri" pitchFamily="34" charset="0"/>
+                <a:ea typeface="Calibri" pitchFamily="34" charset="-122"/>
+                <a:cs typeface="Calibri" pitchFamily="34" charset="-120"/>
+              </a:rPr>
+              <a:t>Table 1. AUC &amp; accuracy@0.5 vs the majority-class baseline — BayesFlow vs exact FB.</a:t>
+            </a:r>
+            <a:endParaRPr lang="en-US" sz="1100" dirty="0"/>
+          </a:p>
+        </p:txBody>
+      </p:sp>
+      <p:sp>
+        <p:nvSpPr>
+          <p:cNvPr id="8" name="Text 5"/>
+          <p:cNvSpPr/>
+          <p:nvPr/>
+        </p:nvSpPr>
+        <p:spPr>
+          <a:xfrm>
+            <a:off x="1005840" y="4846320"/>
+            <a:ext cx="10149840" cy="1737360"/>
+          </a:xfrm>
+          <a:prstGeom prst="rect">
+            <a:avLst/>
+          </a:prstGeom>
+          <a:noFill/>
+          <a:ln/>
+        </p:spPr>
+        <p:txBody>
+          <a:bodyPr wrap="square" rtlCol="0" anchor="t"/>
+          <a:lstStyle/>
+          <a:p>
+            <a:pPr marL="177800" indent="-177800">
+              <a:spcAft>
+                <a:spcPts val="800"/>
+              </a:spcAft>
+              <a:buSzPct val="100000"/>
+              <a:buChar char="•"/>
+            </a:pPr>
+            <a:r>
+              <a:rPr lang="en-US" sz="1300" dirty="0">
+                <a:solidFill>
+                  <a:srgbClr val="1A2E29"/>
+                </a:solidFill>
+                <a:latin typeface="Calibri" pitchFamily="34" charset="0"/>
+                <a:ea typeface="Calibri" pitchFamily="34" charset="-122"/>
+                <a:cs typeface="Calibri" pitchFamily="34" charset="-120"/>
+              </a:rPr>
+              <a:t>BayesFlow ≈ exact FB in every setting — faithful amortization.</a:t>
+            </a:r>
+            <a:endParaRPr lang="en-US" sz="1300" dirty="0"/>
+          </a:p>
+          <a:p>
+            <a:pPr marL="177800" indent="-177800">
+              <a:spcAft>
+                <a:spcPts val="800"/>
+              </a:spcAft>
+              <a:buSzPct val="100000"/>
+              <a:buChar char="•"/>
+            </a:pPr>
+            <a:r>
+              <a:rPr lang="en-US" sz="1300" dirty="0">
+                <a:solidFill>
+                  <a:srgbClr val="1A2E29"/>
+                </a:solidFill>
+                <a:latin typeface="Calibri" pitchFamily="34" charset="0"/>
+                <a:ea typeface="Calibri" pitchFamily="34" charset="-122"/>
+                <a:cs typeface="Calibri" pitchFamily="34" charset="-120"/>
+              </a:rPr>
+              <a:t>Accuracy@0.5 barely clears the majority-class baseline on real data (0.728 vs 0.708) and ties/loses on insulin → AUC is the fair metric, not accuracy.</a:t>
+            </a:r>
+            <a:endParaRPr lang="en-US" sz="1300" dirty="0"/>
+          </a:p>
+          <a:p>
+            <a:pPr marL="177800" indent="-177800">
+              <a:spcAft>
+                <a:spcPts val="800"/>
+              </a:spcAft>
+              <a:buSzPct val="100000"/>
+              <a:buChar char="•"/>
+            </a:pPr>
+            <a:r>
+              <a:rPr lang="en-US" sz="1300" dirty="0">
+                <a:solidFill>
+                  <a:srgbClr val="1A2E29"/>
+                </a:solidFill>
+                <a:latin typeface="Calibri" pitchFamily="34" charset="0"/>
+                <a:ea typeface="Calibri" pitchFamily="34" charset="-122"/>
+                <a:cs typeface="Calibri" pitchFamily="34" charset="-120"/>
+              </a:rPr>
+              <a:t>FB is a ceiling on SIMULATED data only; on real proteins the HMM is misspecified, so a better model can beat it.</a:t>
+            </a:r>
+            <a:endParaRPr lang="en-US" sz="1300" dirty="0"/>
+          </a:p>
+        </p:txBody>
+      </p:sp>
+    </p:spTree>
+  </p:cSld>
+  <p:clrMapOvr>
+    <a:masterClrMapping/>
+  </p:clrMapOvr>
+</p:sld>
+</file>
+
+<file path=ppt/slides/slide15.xml><?xml version="1.0" encoding="utf-8"?>
+<p:sld xmlns:a="http://schemas.openxmlformats.org/drawingml/2006/main" xmlns:r="http://schemas.openxmlformats.org/officeDocument/2006/relationships" xmlns:p="http://schemas.openxmlformats.org/presentationml/2006/main">
+  <p:cSld name="Slide 15">
     <p:bg>
       <p:bgPr>
         <a:solidFill>
@@ -3758,7 +4101,7 @@
                 <a:ea typeface="Calibri" pitchFamily="34" charset="-122"/>
                 <a:cs typeface="Calibri" pitchFamily="34" charset="-120"/>
               </a:rPr>
-              <a:t>BayesFlow amortized posterior trained on exact Forward–Backward targets via a sliding 31-residue window; it reproduces exact FB almost perfectly (r = 0.999).</a:t>
+              <a:t>The likelihood is tractable by design: because the exact posterior is known, we can verify the amortized estimator is faithful — it reproduces exact FB at r = 0.999 (validation impossible in a real SBI problem).</a:t>
             </a:r>
             <a:endParaRPr lang="en-US" sz="1600" dirty="0"/>
           </a:p>
@@ -3779,7 +4122,7 @@
                 <a:ea typeface="Calibri" pitchFamily="34" charset="-122"/>
                 <a:cs typeface="Calibri" pitchFamily="34" charset="-120"/>
               </a:rPr>
-              <a:t>Diagnostics: excellent recovery &amp; contraction, but SBC reveals a small (~0.15 SD) calibration bias — a real, owned limitation.</a:t>
+              <a:t>Diagnostics: SBC reveals a calibration bias on the headline model — but a window-size sweep shows it is a TUNABLE accuracy↔calibration trade-off (best at W≈15), not a bug.</a:t>
             </a:r>
             <a:endParaRPr lang="en-US" sz="1600" dirty="0"/>
           </a:p>
@@ -3797,7 +4140,7 @@
                 <a:ea typeface="Calibri" pitchFamily="34" charset="-122"/>
                 <a:cs typeface="Calibri" pitchFamily="34" charset="-120"/>
               </a:rPr>
-              <a:t>On unseen real proteins it ranks propensity-driven helices well (insulin B-chain 0.98; PISCES 0.75) but fails where structure is 3-D-stabilised (insulin A-chain 0.52) — the price of a sequence-only model.</a:t>
+              <a:t>On unseen real proteins it ranks propensity-driven helices well (insulin B-chain 0.98 [0.93–1.00]; 8,994 PISCES chains ≈ 0.75) — the honest limit of a sequence-only model.</a:t>
             </a:r>
             <a:endParaRPr lang="en-US" sz="1600" dirty="0"/>
           </a:p>
@@ -5230,8 +5573,8 @@
         </p:nvSpPr>
         <p:spPr>
           <a:xfrm>
-            <a:off x="502920" y="1874520"/>
-            <a:ext cx="4572000" cy="3840480"/>
+            <a:off x="502920" y="1828800"/>
+            <a:ext cx="4572000" cy="2286000"/>
           </a:xfrm>
           <a:prstGeom prst="rect">
             <a:avLst/>
@@ -5251,7 +5594,7 @@
               <a:buChar char="•"/>
             </a:pPr>
             <a:r>
-              <a:rPr lang="en-US" sz="1450" dirty="0">
+              <a:rPr lang="en-US" sz="1400" dirty="0">
                 <a:solidFill>
                   <a:srgbClr val="1A2E29"/>
                 </a:solidFill>
@@ -5261,7 +5604,7 @@
               </a:rPr>
               <a:t>The chain always starts in “other”.</a:t>
             </a:r>
-            <a:endParaRPr lang="en-US" sz="1450" dirty="0"/>
+            <a:endParaRPr lang="en-US" sz="1400" dirty="0"/>
           </a:p>
           <a:p>
             <a:pPr marL="177800" indent="-177800">
@@ -5272,7 +5615,7 @@
               <a:buChar char="•"/>
             </a:pPr>
             <a:r>
-              <a:rPr lang="en-US" sz="1450" dirty="0">
+              <a:rPr lang="en-US" sz="1400" dirty="0">
                 <a:solidFill>
                   <a:srgbClr val="1A2E29"/>
                 </a:solidFill>
@@ -5282,7 +5625,7 @@
               </a:rPr>
               <a:t>Transitions: helix→helix 0.90, other→helix 0.05.</a:t>
             </a:r>
-            <a:endParaRPr lang="en-US" sz="1450" dirty="0"/>
+            <a:endParaRPr lang="en-US" sz="1400" dirty="0"/>
           </a:p>
           <a:p>
             <a:pPr marL="177800" indent="-177800">
@@ -5293,7 +5636,7 @@
               <a:buChar char="•"/>
             </a:pPr>
             <a:r>
-              <a:rPr lang="en-US" sz="1450" dirty="0">
+              <a:rPr lang="en-US" sz="1400" dirty="0">
                 <a:solidFill>
                   <a:srgbClr val="1A2E29"/>
                 </a:solidFill>
@@ -5303,7 +5646,7 @@
               </a:rPr>
               <a:t>So helices form ~10-residue runs, and are started rarely.</a:t>
             </a:r>
-            <a:endParaRPr lang="en-US" sz="1450" dirty="0"/>
+            <a:endParaRPr lang="en-US" sz="1400" dirty="0"/>
           </a:p>
           <a:p>
             <a:pPr marL="177800" indent="-177800">
@@ -5314,7 +5657,7 @@
               <a:buChar char="•"/>
             </a:pPr>
             <a:r>
-              <a:rPr lang="en-US" sz="1450" dirty="0">
+              <a:rPr lang="en-US" sz="1400" dirty="0">
                 <a:solidFill>
                   <a:srgbClr val="1A2E29"/>
                 </a:solidFill>
@@ -5324,7 +5667,86 @@
               </a:rPr>
               <a:t>Realistic: real data gives 0.912 and 0.041 (see next slide).</a:t>
             </a:r>
-            <a:endParaRPr lang="en-US" sz="1450" dirty="0"/>
+            <a:endParaRPr lang="en-US" sz="1400" dirty="0"/>
+          </a:p>
+        </p:txBody>
+      </p:sp>
+      <p:sp>
+        <p:nvSpPr>
+          <p:cNvPr id="9" name="Shape 6"/>
+          <p:cNvSpPr/>
+          <p:nvPr/>
+        </p:nvSpPr>
+        <p:spPr>
+          <a:xfrm>
+            <a:off x="502920" y="4251960"/>
+            <a:ext cx="4572000" cy="1691640"/>
+          </a:xfrm>
+          <a:prstGeom prst="roundRect">
+            <a:avLst>
+              <a:gd name="adj" fmla="val 5405"/>
+            </a:avLst>
+          </a:prstGeom>
+          <a:solidFill>
+            <a:srgbClr val="EAF5F0"/>
+          </a:solidFill>
+          <a:ln/>
+        </p:spPr>
+      </p:sp>
+      <p:sp>
+        <p:nvSpPr>
+          <p:cNvPr id="10" name="Text 7"/>
+          <p:cNvSpPr/>
+          <p:nvPr/>
+        </p:nvSpPr>
+        <p:spPr>
+          <a:xfrm>
+            <a:off x="731520" y="4389120"/>
+            <a:ext cx="4160520" cy="1463040"/>
+          </a:xfrm>
+          <a:prstGeom prst="rect">
+            <a:avLst/>
+          </a:prstGeom>
+          <a:noFill/>
+          <a:ln/>
+        </p:spPr>
+        <p:txBody>
+          <a:bodyPr wrap="square" lIns="0" tIns="0" rIns="0" bIns="0" rtlCol="0" anchor="t"/>
+          <a:lstStyle/>
+          <a:p>
+            <a:pPr indent="0" marL="0">
+              <a:buNone/>
+            </a:pPr>
+            <a:r>
+              <a:rPr lang="en-US" sz="1350" b="1" dirty="0">
+                <a:solidFill>
+                  <a:srgbClr val="0F6E56"/>
+                </a:solidFill>
+                <a:latin typeface="Calibri" pitchFamily="34" charset="0"/>
+                <a:ea typeface="Calibri" pitchFamily="34" charset="-122"/>
+                <a:cs typeface="Calibri" pitchFamily="34" charset="-120"/>
+              </a:rPr>
+              <a:t>Prior &amp; likelihood
+</a:t>
+            </a:r>
+            <a:endParaRPr lang="en-US" sz="1350" dirty="0"/>
+          </a:p>
+          <a:p>
+            <a:pPr indent="0" marL="0">
+              <a:buNone/>
+            </a:pPr>
+            <a:r>
+              <a:rPr lang="en-US" sz="1200" dirty="0">
+                <a:solidFill>
+                  <a:srgbClr val="1A2E29"/>
+                </a:solidFill>
+                <a:latin typeface="Calibri" pitchFamily="34" charset="0"/>
+                <a:ea typeface="Calibri" pitchFamily="34" charset="-122"/>
+                <a:cs typeface="Calibri" pitchFamily="34" charset="-120"/>
+              </a:rPr>
+              <a:t>No parameters are inferred — all fixed. The prior is the induced distribution over hidden state paths p(z₁:T), from start = [0,1] and the transition matrix. The likelihood is the emission table.</a:t>
+            </a:r>
+            <a:endParaRPr lang="en-US" sz="1350" dirty="0"/>
           </a:p>
         </p:txBody>
       </p:sp>
@@ -6144,7 +6566,7 @@
       </p:sp>
       <p:pic>
         <p:nvPicPr>
-          <p:cNvPr id="6" name="Image 0" descr="D:/SBI/restart/bayesflow_window_schematic.png">    </p:cNvPr>
+          <p:cNvPr id="6" name="Image 0" descr="D:/SBI/restart/figures/bayesflow_window_schematic.png">    </p:cNvPr>
           <p:cNvPicPr>
             <a:picLocks noChangeAspect="1"/>
           </p:cNvPicPr>
@@ -6158,8 +6580,8 @@
         </p:blipFill>
         <p:spPr>
           <a:xfrm>
-            <a:off x="1691640" y="1645920"/>
-            <a:ext cx="8778240" cy="3474720"/>
+            <a:off x="2148840" y="1600200"/>
+            <a:ext cx="7863840" cy="3108960"/>
           </a:xfrm>
           <a:prstGeom prst="rect">
             <a:avLst/>
@@ -6174,8 +6596,8 @@
         </p:nvSpPr>
         <p:spPr>
           <a:xfrm>
-            <a:off x="1691640" y="5120640"/>
-            <a:ext cx="8778240" cy="457200"/>
+            <a:off x="2148840" y="4736592"/>
+            <a:ext cx="7863840" cy="457200"/>
           </a:xfrm>
           <a:prstGeom prst="rect">
             <a:avLst/>
@@ -6213,8 +6635,8 @@
         </p:nvSpPr>
         <p:spPr>
           <a:xfrm>
-            <a:off x="502920" y="5486400"/>
-            <a:ext cx="11155680" cy="1280160"/>
+            <a:off x="502920" y="5120640"/>
+            <a:ext cx="6675120" cy="1645920"/>
           </a:xfrm>
           <a:prstGeom prst="rect">
             <a:avLst/>
@@ -6234,7 +6656,7 @@
               <a:buChar char="•"/>
             </a:pPr>
             <a:r>
-              <a:rPr lang="en-US" sz="1250" dirty="0">
+              <a:rPr lang="en-US" sz="1200" dirty="0">
                 <a:solidFill>
                   <a:srgbClr val="1A2E29"/>
                 </a:solidFill>
@@ -6242,9 +6664,9 @@
                 <a:ea typeface="Calibri" pitchFamily="34" charset="-122"/>
                 <a:cs typeface="Calibri" pitchFamily="34" charset="-120"/>
               </a:rPr>
-              <a:t>A flow needs a fixed-size target → predict one residue from a fixed 31-residue window (±15), slid along the chain.</a:t>
-            </a:r>
-            <a:endParaRPr lang="en-US" sz="1250" dirty="0"/>
+              <a:t>Flow needs a fixed-size input → predict one residue from a fixed 31-residue window (±15), slid along the chain.</a:t>
+            </a:r>
+            <a:endParaRPr lang="en-US" sz="1200" dirty="0"/>
           </a:p>
           <a:p>
             <a:pPr marL="177800" indent="-177800">
@@ -6255,7 +6677,7 @@
               <a:buChar char="•"/>
             </a:pPr>
             <a:r>
-              <a:rPr lang="en-US" sz="1250" dirty="0">
+              <a:rPr lang="en-US" sz="1200" dirty="0">
                 <a:solidFill>
                   <a:srgbClr val="1A2E29"/>
                 </a:solidFill>
@@ -6263,9 +6685,9 @@
                 <a:ea typeface="Calibri" pitchFamily="34" charset="-122"/>
                 <a:cs typeface="Calibri" pitchFamily="34" charset="-120"/>
               </a:rPr>
-              <a:t>Encode the window as one-hot: 31 × 21 channels = 20 amino acids + 1 padding (for chain ends).</a:t>
-            </a:r>
-            <a:endParaRPr lang="en-US" sz="1250" dirty="0"/>
+              <a:t>One-hot: 31 × 21 channels = 20 amino acids + 1 padding (chain ends).</a:t>
+            </a:r>
+            <a:endParaRPr lang="en-US" sz="1200" dirty="0"/>
           </a:p>
           <a:p>
             <a:pPr marL="177800" indent="-177800">
@@ -6276,7 +6698,7 @@
               <a:buChar char="•"/>
             </a:pPr>
             <a:r>
-              <a:rPr lang="en-US" sz="1250" dirty="0">
+              <a:rPr lang="en-US" sz="1200" dirty="0">
                 <a:solidFill>
                   <a:srgbClr val="1A2E29"/>
                 </a:solidFill>
@@ -6284,9 +6706,88 @@
                 <a:ea typeface="Calibri" pitchFamily="34" charset="-122"/>
                 <a:cs typeface="Calibri" pitchFamily="34" charset="-120"/>
               </a:rPr>
-              <a:t>The window is only local → the answer stays uncertain → a genuine posterior (mean ± std), not a point estimate.</a:t>
-            </a:r>
-            <a:endParaRPr lang="en-US" sz="1250" dirty="0"/>
+              <a:t>Given the FULL sequence, γ is DETERMINISTIC (a point mass) — nothing to estimate. We condition on a LOCAL window so γ becomes uncertain → a genuine posterior to learn.</a:t>
+            </a:r>
+            <a:endParaRPr lang="en-US" sz="1200" dirty="0"/>
+          </a:p>
+        </p:txBody>
+      </p:sp>
+      <p:sp>
+        <p:nvSpPr>
+          <p:cNvPr id="9" name="Shape 6"/>
+          <p:cNvSpPr/>
+          <p:nvPr/>
+        </p:nvSpPr>
+        <p:spPr>
+          <a:xfrm>
+            <a:off x="7452360" y="5029200"/>
+            <a:ext cx="4206240" cy="1600200"/>
+          </a:xfrm>
+          <a:prstGeom prst="roundRect">
+            <a:avLst>
+              <a:gd name="adj" fmla="val 5714"/>
+            </a:avLst>
+          </a:prstGeom>
+          <a:solidFill>
+            <a:srgbClr val="0F6E56"/>
+          </a:solidFill>
+          <a:ln/>
+        </p:spPr>
+      </p:sp>
+      <p:sp>
+        <p:nvSpPr>
+          <p:cNvPr id="10" name="Text 7"/>
+          <p:cNvSpPr/>
+          <p:nvPr/>
+        </p:nvSpPr>
+        <p:spPr>
+          <a:xfrm>
+            <a:off x="7680960" y="5138928"/>
+            <a:ext cx="3749040" cy="1417320"/>
+          </a:xfrm>
+          <a:prstGeom prst="rect">
+            <a:avLst/>
+          </a:prstGeom>
+          <a:noFill/>
+          <a:ln/>
+        </p:spPr>
+        <p:txBody>
+          <a:bodyPr wrap="square" lIns="0" tIns="0" rIns="0" bIns="0" rtlCol="0" anchor="t"/>
+          <a:lstStyle/>
+          <a:p>
+            <a:pPr indent="0" marL="0">
+              <a:buNone/>
+            </a:pPr>
+            <a:r>
+              <a:rPr lang="en-US" sz="1300" b="1" dirty="0">
+                <a:solidFill>
+                  <a:srgbClr val="8FE3C6"/>
+                </a:solidFill>
+                <a:latin typeface="Calibri" pitchFamily="34" charset="0"/>
+                <a:ea typeface="Calibri" pitchFamily="34" charset="-122"/>
+                <a:cs typeface="Calibri" pitchFamily="34" charset="-120"/>
+              </a:rPr>
+              <a:t>Why ±15 is enough
+</a:t>
+            </a:r>
+            <a:endParaRPr lang="en-US" sz="1300" dirty="0"/>
+          </a:p>
+          <a:p>
+            <a:pPr indent="0" marL="0">
+              <a:buNone/>
+            </a:pPr>
+            <a:r>
+              <a:rPr lang="en-US" sz="1150" dirty="0">
+                <a:solidFill>
+                  <a:srgbClr val="FFFFFF"/>
+                </a:solidFill>
+                <a:latin typeface="Calibri" pitchFamily="34" charset="0"/>
+                <a:ea typeface="Calibri" pitchFamily="34" charset="-122"/>
+                <a:cs typeface="Calibri" pitchFamily="34" charset="-120"/>
+              </a:rPr>
+              <a:t>2nd eigenvalue λ₂ = 1 − 0.10 − 0.05 = 0.85 → influence decays geometrically: 0.85¹⁵ ≈ 0.09. Residues outside the window carry &lt;10%. So r = 0.999 is expected, not suspicious.</a:t>
+            </a:r>
+            <a:endParaRPr lang="en-US" sz="1300" dirty="0"/>
           </a:p>
         </p:txBody>
       </p:sp>
@@ -7405,11 +7906,11 @@
         <p:spPr>
           <a:xfrm>
             <a:off x="7680960" y="3657600"/>
-            <a:ext cx="3977640" cy="1508760"/>
+            <a:ext cx="3977640" cy="1783080"/>
           </a:xfrm>
           <a:prstGeom prst="roundRect">
             <a:avLst>
-              <a:gd name="adj" fmla="val 6061"/>
+              <a:gd name="adj" fmla="val 5128"/>
             </a:avLst>
           </a:prstGeom>
           <a:solidFill>
@@ -7426,8 +7927,8 @@
         </p:nvSpPr>
         <p:spPr>
           <a:xfrm>
-            <a:off x="7909560" y="3794760"/>
-            <a:ext cx="3566160" cy="1280160"/>
+            <a:off x="7909560" y="3767328"/>
+            <a:ext cx="3566160" cy="1600200"/>
           </a:xfrm>
           <a:prstGeom prst="rect">
             <a:avLst/>
@@ -7443,7 +7944,7 @@
               <a:buNone/>
             </a:pPr>
             <a:r>
-              <a:rPr lang="en-US" sz="1400" b="1" dirty="0">
+              <a:rPr lang="en-US" sz="1300" b="1" dirty="0">
                 <a:solidFill>
                   <a:srgbClr val="8FE3C6"/>
                 </a:solidFill>
@@ -7451,17 +7952,17 @@
                 <a:ea typeface="Calibri" pitchFamily="34" charset="-122"/>
                 <a:cs typeface="Calibri" pitchFamily="34" charset="-120"/>
               </a:rPr>
-              <a:t>Why a window?
+              <a:t>Why SBI if the likelihood is tractable?
 </a:t>
             </a:r>
-            <a:endParaRPr lang="en-US" sz="1400" dirty="0"/>
+            <a:endParaRPr lang="en-US" sz="1300" dirty="0"/>
           </a:p>
           <a:p>
             <a:pPr indent="0" marL="0">
               <a:buNone/>
             </a:pPr>
             <a:r>
-              <a:rPr lang="en-US" sz="1200" dirty="0">
+              <a:rPr lang="en-US" sz="1150" dirty="0">
                 <a:solidFill>
                   <a:srgbClr val="FFFFFF"/>
                 </a:solidFill>
@@ -7469,9 +7970,9 @@
                 <a:ea typeface="Calibri" pitchFamily="34" charset="-122"/>
                 <a:cs typeface="Calibri" pitchFamily="34" charset="-120"/>
               </a:rPr>
-              <a:t>One trained model does inference for a chain of ANY length — just slide the window. Amortized: no re-fitting per protein.</a:t>
-            </a:r>
-            <a:endParaRPr lang="en-US" sz="1400" dirty="0"/>
+              <a:t>Because tractability is the point. The exact posterior is KNOWN here, so we can verify the amortized estimator is faithful — validation that is impossible in a real SBI problem.</a:t>
+            </a:r>
+            <a:endParaRPr lang="en-US" sz="1300" dirty="0"/>
           </a:p>
         </p:txBody>
       </p:sp>
@@ -7646,7 +8147,7 @@
       </p:sp>
       <p:pic>
         <p:nvPicPr>
-          <p:cNvPr id="6" name="Image 0" descr="D:/SBI/restart/insulin_1MSO_slide.png">    </p:cNvPr>
+          <p:cNvPr id="6" name="Image 0" descr="D:/SBI/restart/figures/insulin_1MSO_slide.png">    </p:cNvPr>
           <p:cNvPicPr>
             <a:picLocks noChangeAspect="1"/>
           </p:cNvPicPr>
@@ -7716,7 +8217,7 @@
         <p:spPr>
           <a:xfrm>
             <a:off x="457200" y="1828800"/>
-            <a:ext cx="4297680" cy="4114800"/>
+            <a:ext cx="4297680" cy="4206240"/>
           </a:xfrm>
           <a:prstGeom prst="rect">
             <a:avLst/>
@@ -7736,7 +8237,7 @@
               <a:buChar char="•"/>
             </a:pPr>
             <a:r>
-              <a:rPr lang="en-US" sz="1350" dirty="0">
+              <a:rPr lang="en-US" sz="1250" dirty="0">
                 <a:solidFill>
                   <a:srgbClr val="1A2E29"/>
                 </a:solidFill>
@@ -7746,7 +8247,7 @@
               </a:rPr>
               <a:t>Insulin + true DSSP labels from the dataset; model trained ONLY on simulated data (unseen).</a:t>
             </a:r>
-            <a:endParaRPr lang="en-US" sz="1350" dirty="0"/>
+            <a:endParaRPr lang="en-US" sz="1250" dirty="0"/>
           </a:p>
           <a:p>
             <a:pPr marL="177800" indent="-177800">
@@ -7757,7 +8258,7 @@
               <a:buChar char="•"/>
             </a:pPr>
             <a:r>
-              <a:rPr lang="en-US" sz="1350" dirty="0">
+              <a:rPr lang="en-US" sz="1250" dirty="0">
                 <a:solidFill>
                   <a:srgbClr val="1A2E29"/>
                 </a:solidFill>
@@ -7765,9 +8266,9 @@
                 <a:ea typeface="Calibri" pitchFamily="34" charset="-122"/>
                 <a:cs typeface="Calibri" pitchFamily="34" charset="-120"/>
               </a:rPr>
-              <a:t>B-chain helix is propensity-driven (L,V,E,A) → nailed, AUC 0.98.</a:t>
-            </a:r>
-            <a:endParaRPr lang="en-US" sz="1350" dirty="0"/>
+              <a:t>B-chain: AUC 0.98 [95% CI 0.93–1.00] — robust, excludes chance. Its helix is propensity-driven (L,V,E,A).</a:t>
+            </a:r>
+            <a:endParaRPr lang="en-US" sz="1250" dirty="0"/>
           </a:p>
           <a:p>
             <a:pPr marL="177800" indent="-177800">
@@ -7778,7 +8279,7 @@
               <a:buChar char="•"/>
             </a:pPr>
             <a:r>
-              <a:rPr lang="en-US" sz="1350" dirty="0">
+              <a:rPr lang="en-US" sz="1250" dirty="0">
                 <a:solidFill>
                   <a:srgbClr val="1A2E29"/>
                 </a:solidFill>
@@ -7786,9 +8287,9 @@
                 <a:ea typeface="Calibri" pitchFamily="34" charset="-122"/>
                 <a:cs typeface="Calibri" pitchFamily="34" charset="-120"/>
               </a:rPr>
-              <a:t>A-chain helix is disulfide-stabilised &amp; Cys-rich; C disfavours helix in our table → model predicts “not helix” → AUC 0.52 (chance).</a:t>
-            </a:r>
-            <a:endParaRPr lang="en-US" sz="1350" dirty="0"/>
+              <a:t>A-chain: AUC 0.53 [95% CI 0.25–0.79] — CI straddles chance, so n=21 residues can’t settle it.</a:t>
+            </a:r>
+            <a:endParaRPr lang="en-US" sz="1250" dirty="0"/>
           </a:p>
           <a:p>
             <a:pPr marL="177800" indent="-177800">
@@ -7799,7 +8300,7 @@
               <a:buChar char="•"/>
             </a:pPr>
             <a:r>
-              <a:rPr lang="en-US" sz="1350" dirty="0">
+              <a:rPr lang="en-US" sz="1250" dirty="0">
                 <a:solidFill>
                   <a:srgbClr val="1A2E29"/>
                 </a:solidFill>
@@ -7807,9 +8308,9 @@
                 <a:ea typeface="Calibri" pitchFamily="34" charset="-122"/>
                 <a:cs typeface="Calibri" pitchFamily="34" charset="-120"/>
               </a:rPr>
-              <a:t>A sequence-only HMM cannot see 3-D disulfide bonds.</a:t>
-            </a:r>
-            <a:endParaRPr lang="en-US" sz="1350" dirty="0"/>
+              <a:t>Hypothesis consistent with the data: the A-chain helix is disulfide-stabilised &amp; Cys-rich, and C disfavours helix in our table — a sequence-only HMM cannot see 3-D bonds.</a:t>
+            </a:r>
+            <a:endParaRPr lang="en-US" sz="1250" dirty="0"/>
           </a:p>
         </p:txBody>
       </p:sp>
